--- a/Generative Deep Learning.pptx
+++ b/Generative Deep Learning.pptx
@@ -5,10 +5,10 @@
     <p:sldMasterId id="2147483660" r:id="rId1"/>
   </p:sldMasterIdLst>
   <p:notesMasterIdLst>
-    <p:notesMasterId r:id="rId28"/>
+    <p:notesMasterId r:id="rId30"/>
   </p:notesMasterIdLst>
   <p:handoutMasterIdLst>
-    <p:handoutMasterId r:id="rId29"/>
+    <p:handoutMasterId r:id="rId31"/>
   </p:handoutMasterIdLst>
   <p:sldIdLst>
     <p:sldId id="256" r:id="rId2"/>
@@ -29,14 +29,16 @@
     <p:sldId id="1327" r:id="rId17"/>
     <p:sldId id="1331" r:id="rId18"/>
     <p:sldId id="1328" r:id="rId19"/>
-    <p:sldId id="1321" r:id="rId20"/>
-    <p:sldId id="1334" r:id="rId21"/>
-    <p:sldId id="1335" r:id="rId22"/>
-    <p:sldId id="1339" r:id="rId23"/>
-    <p:sldId id="1340" r:id="rId24"/>
-    <p:sldId id="1336" r:id="rId25"/>
+    <p:sldId id="1334" r:id="rId20"/>
+    <p:sldId id="1335" r:id="rId21"/>
+    <p:sldId id="1339" r:id="rId22"/>
+    <p:sldId id="1340" r:id="rId23"/>
+    <p:sldId id="1336" r:id="rId24"/>
+    <p:sldId id="1341" r:id="rId25"/>
     <p:sldId id="1337" r:id="rId26"/>
-    <p:sldId id="1338" r:id="rId27"/>
+    <p:sldId id="1343" r:id="rId27"/>
+    <p:sldId id="1342" r:id="rId28"/>
+    <p:sldId id="1338" r:id="rId29"/>
   </p:sldIdLst>
   <p:sldSz cx="12192000" cy="6858000"/>
   <p:notesSz cx="6858000" cy="9144000"/>
@@ -162,13 +164,15 @@
             <p14:sldId id="1327"/>
             <p14:sldId id="1331"/>
             <p14:sldId id="1328"/>
-            <p14:sldId id="1321"/>
             <p14:sldId id="1334"/>
             <p14:sldId id="1335"/>
             <p14:sldId id="1339"/>
             <p14:sldId id="1340"/>
             <p14:sldId id="1336"/>
+            <p14:sldId id="1341"/>
             <p14:sldId id="1337"/>
+            <p14:sldId id="1343"/>
+            <p14:sldId id="1342"/>
             <p14:sldId id="1338"/>
           </p14:sldIdLst>
         </p14:section>
@@ -7017,7 +7021,7 @@
         <p:cNvPr id="1" name="">
           <a:extLst>
             <a:ext uri="{FF2B5EF4-FFF2-40B4-BE49-F238E27FC236}">
-              <a16:creationId xmlns:a16="http://schemas.microsoft.com/office/drawing/2014/main" id="{B8EA7EAA-EA19-F045-13D0-A5248C4BCDBF}"/>
+              <a16:creationId xmlns:a16="http://schemas.microsoft.com/office/drawing/2014/main" id="{94B84F52-3789-EEC2-F35F-2D16440A7E06}"/>
             </a:ext>
           </a:extLst>
         </p:cNvPr>
@@ -7037,7 +7041,7 @@
           <p:cNvPr id="3" name="제목 1">
             <a:extLst>
               <a:ext uri="{FF2B5EF4-FFF2-40B4-BE49-F238E27FC236}">
-                <a16:creationId xmlns:a16="http://schemas.microsoft.com/office/drawing/2014/main" id="{13D6B663-6FD0-C2BA-DBAF-64EC754C92F6}"/>
+                <a16:creationId xmlns:a16="http://schemas.microsoft.com/office/drawing/2014/main" id="{E52B1B47-6798-59C1-02C0-78A40F43FE41}"/>
               </a:ext>
             </a:extLst>
           </p:cNvPr>
@@ -7092,241 +7096,227 @@
                 <a:ea typeface="D2Coding" panose="020B0609020101020101" pitchFamily="49" charset="-127"/>
                 <a:cs typeface="Segoe UI Light" panose="020B0502040204020203" pitchFamily="34" charset="0"/>
               </a:rPr>
-              <a:t>Introduction to Generative Deep Learning</a:t>
-            </a:r>
-            <a:endParaRPr lang="ko-KR" altLang="en-US" sz="2800" cap="none" dirty="0">
-              <a:solidFill>
-                <a:schemeClr val="bg2">
-                  <a:lumMod val="25000"/>
-                </a:schemeClr>
-              </a:solidFill>
-              <a:latin typeface="D2Coding" panose="020B0609020101020101" pitchFamily="49" charset="-127"/>
-              <a:ea typeface="D2Coding" panose="020B0609020101020101" pitchFamily="49" charset="-127"/>
-              <a:cs typeface="Segoe UI Light" panose="020B0502040204020203" pitchFamily="34" charset="0"/>
-            </a:endParaRPr>
+              <a:t>Hello </a:t>
+            </a:r>
+            <a:r>
+              <a:rPr lang="en-US" altLang="ko-KR" sz="2800" cap="none" dirty="0" err="1">
+                <a:solidFill>
+                  <a:schemeClr val="bg2">
+                    <a:lumMod val="25000"/>
+                  </a:schemeClr>
+                </a:solidFill>
+                <a:latin typeface="D2Coding" panose="020B0609020101020101" pitchFamily="49" charset="-127"/>
+                <a:ea typeface="D2Coding" panose="020B0609020101020101" pitchFamily="49" charset="-127"/>
+                <a:cs typeface="Segoe UI Light" panose="020B0502040204020203" pitchFamily="34" charset="0"/>
+              </a:rPr>
+              <a:t>Wrodl</a:t>
+            </a:r>
+            <a:r>
+              <a:rPr lang="en-US" altLang="ko-KR" sz="2800" cap="none" dirty="0">
+                <a:solidFill>
+                  <a:schemeClr val="bg2">
+                    <a:lumMod val="25000"/>
+                  </a:schemeClr>
+                </a:solidFill>
+                <a:latin typeface="D2Coding" panose="020B0609020101020101" pitchFamily="49" charset="-127"/>
+                <a:ea typeface="D2Coding" panose="020B0609020101020101" pitchFamily="49" charset="-127"/>
+                <a:cs typeface="Segoe UI Light" panose="020B0502040204020203" pitchFamily="34" charset="0"/>
+              </a:rPr>
+              <a:t>!</a:t>
+            </a:r>
           </a:p>
         </p:txBody>
       </p:sp>
       <p:sp>
         <p:nvSpPr>
-          <p:cNvPr id="2" name="TextBox 1">
+          <p:cNvPr id="51" name="슬라이드 번호 개체 틀 3">
             <a:extLst>
               <a:ext uri="{FF2B5EF4-FFF2-40B4-BE49-F238E27FC236}">
-                <a16:creationId xmlns:a16="http://schemas.microsoft.com/office/drawing/2014/main" id="{252AA155-07E6-0DAE-F014-D56FDEB0AA9C}"/>
+                <a16:creationId xmlns:a16="http://schemas.microsoft.com/office/drawing/2014/main" id="{B95896C3-E642-4C49-D016-D0735075C166}"/>
               </a:ext>
             </a:extLst>
           </p:cNvPr>
-          <p:cNvSpPr txBox="1"/>
+          <p:cNvSpPr txBox="1">
+            <a:spLocks/>
+          </p:cNvSpPr>
           <p:nvPr/>
         </p:nvSpPr>
         <p:spPr>
           <a:xfrm>
-            <a:off x="1486417" y="1572272"/>
-            <a:ext cx="6981307" cy="4404860"/>
+            <a:off x="11180761" y="299420"/>
+            <a:ext cx="753545" cy="365125"/>
+          </a:xfrm>
+          <a:prstGeom prst="rect">
+            <a:avLst/>
+          </a:prstGeom>
+        </p:spPr>
+        <p:txBody>
+          <a:bodyPr vert="horz" lIns="91440" tIns="45720" rIns="91440" bIns="45720" rtlCol="0" anchor="ctr"/>
+          <a:lstStyle>
+            <a:defPPr rtl="0">
+              <a:defRPr lang="ko-KR"/>
+            </a:defPPr>
+            <a:lvl1pPr marL="0" algn="r" defTabSz="914400" rtl="0" eaLnBrk="1" latinLnBrk="0" hangingPunct="1">
+              <a:defRPr sz="1200" kern="1200" baseline="0">
+                <a:solidFill>
+                  <a:schemeClr val="tx1">
+                    <a:lumMod val="65000"/>
+                    <a:lumOff val="35000"/>
+                  </a:schemeClr>
+                </a:solidFill>
+                <a:latin typeface="맑은 고딕" panose="020B0503020000020004" pitchFamily="50" charset="-127"/>
+                <a:ea typeface="맑은 고딕" panose="020B0503020000020004" pitchFamily="50" charset="-127"/>
+                <a:cs typeface="+mn-cs"/>
+              </a:defRPr>
+            </a:lvl1pPr>
+            <a:lvl2pPr marL="457200" algn="l" defTabSz="914400" rtl="0" eaLnBrk="1" latinLnBrk="0" hangingPunct="1">
+              <a:defRPr sz="1800" kern="1200">
+                <a:solidFill>
+                  <a:schemeClr val="tx1"/>
+                </a:solidFill>
+                <a:latin typeface="+mn-lt"/>
+                <a:ea typeface="+mn-ea"/>
+                <a:cs typeface="+mn-cs"/>
+              </a:defRPr>
+            </a:lvl2pPr>
+            <a:lvl3pPr marL="914400" algn="l" defTabSz="914400" rtl="0" eaLnBrk="1" latinLnBrk="0" hangingPunct="1">
+              <a:defRPr sz="1800" kern="1200">
+                <a:solidFill>
+                  <a:schemeClr val="tx1"/>
+                </a:solidFill>
+                <a:latin typeface="+mn-lt"/>
+                <a:ea typeface="+mn-ea"/>
+                <a:cs typeface="+mn-cs"/>
+              </a:defRPr>
+            </a:lvl3pPr>
+            <a:lvl4pPr marL="1371600" algn="l" defTabSz="914400" rtl="0" eaLnBrk="1" latinLnBrk="0" hangingPunct="1">
+              <a:defRPr sz="1800" kern="1200">
+                <a:solidFill>
+                  <a:schemeClr val="tx1"/>
+                </a:solidFill>
+                <a:latin typeface="+mn-lt"/>
+                <a:ea typeface="+mn-ea"/>
+                <a:cs typeface="+mn-cs"/>
+              </a:defRPr>
+            </a:lvl4pPr>
+            <a:lvl5pPr marL="1828800" algn="l" defTabSz="914400" rtl="0" eaLnBrk="1" latinLnBrk="0" hangingPunct="1">
+              <a:defRPr sz="1800" kern="1200">
+                <a:solidFill>
+                  <a:schemeClr val="tx1"/>
+                </a:solidFill>
+                <a:latin typeface="+mn-lt"/>
+                <a:ea typeface="+mn-ea"/>
+                <a:cs typeface="+mn-cs"/>
+              </a:defRPr>
+            </a:lvl5pPr>
+            <a:lvl6pPr marL="2286000" algn="l" defTabSz="914400" rtl="0" eaLnBrk="1" latinLnBrk="0" hangingPunct="1">
+              <a:defRPr sz="1800" kern="1200">
+                <a:solidFill>
+                  <a:schemeClr val="tx1"/>
+                </a:solidFill>
+                <a:latin typeface="+mn-lt"/>
+                <a:ea typeface="+mn-ea"/>
+                <a:cs typeface="+mn-cs"/>
+              </a:defRPr>
+            </a:lvl6pPr>
+            <a:lvl7pPr marL="2743200" algn="l" defTabSz="914400" rtl="0" eaLnBrk="1" latinLnBrk="0" hangingPunct="1">
+              <a:defRPr sz="1800" kern="1200">
+                <a:solidFill>
+                  <a:schemeClr val="tx1"/>
+                </a:solidFill>
+                <a:latin typeface="+mn-lt"/>
+                <a:ea typeface="+mn-ea"/>
+                <a:cs typeface="+mn-cs"/>
+              </a:defRPr>
+            </a:lvl7pPr>
+            <a:lvl8pPr marL="3200400" algn="l" defTabSz="914400" rtl="0" eaLnBrk="1" latinLnBrk="0" hangingPunct="1">
+              <a:defRPr sz="1800" kern="1200">
+                <a:solidFill>
+                  <a:schemeClr val="tx1"/>
+                </a:solidFill>
+                <a:latin typeface="+mn-lt"/>
+                <a:ea typeface="+mn-ea"/>
+                <a:cs typeface="+mn-cs"/>
+              </a:defRPr>
+            </a:lvl8pPr>
+            <a:lvl9pPr marL="3657600" algn="l" defTabSz="914400" rtl="0" eaLnBrk="1" latinLnBrk="0" hangingPunct="1">
+              <a:defRPr sz="1800" kern="1200">
+                <a:solidFill>
+                  <a:schemeClr val="tx1"/>
+                </a:solidFill>
+                <a:latin typeface="+mn-lt"/>
+                <a:ea typeface="+mn-ea"/>
+                <a:cs typeface="+mn-cs"/>
+              </a:defRPr>
+            </a:lvl9pPr>
+          </a:lstStyle>
+          <a:p>
+            <a:fld id="{D57F1E4F-1CFF-5643-939E-217C01CDF565}" type="slidenum">
+              <a:rPr lang="en-US" b="1" smtClean="0">
+                <a:latin typeface="Segoe UI Emoji" panose="020B0502040204020203" pitchFamily="34" charset="0"/>
+                <a:ea typeface="Segoe UI Emoji" panose="020B0502040204020203" pitchFamily="34" charset="0"/>
+              </a:rPr>
+              <a:pPr/>
+              <a:t>19</a:t>
+            </a:fld>
+            <a:endParaRPr lang="en-US" b="1" dirty="0">
+              <a:latin typeface="Segoe UI Emoji" panose="020B0502040204020203" pitchFamily="34" charset="0"/>
+              <a:ea typeface="Segoe UI Emoji" panose="020B0502040204020203" pitchFamily="34" charset="0"/>
+            </a:endParaRPr>
+          </a:p>
+        </p:txBody>
+      </p:sp>
+      <p:sp>
+        <p:nvSpPr>
+          <p:cNvPr id="2" name="AutoShape 2">
+            <a:extLst>
+              <a:ext uri="{FF2B5EF4-FFF2-40B4-BE49-F238E27FC236}">
+                <a16:creationId xmlns:a16="http://schemas.microsoft.com/office/drawing/2014/main" id="{C6971E7F-CB7B-410C-E673-99AE6B74C05E}"/>
+              </a:ext>
+            </a:extLst>
+          </p:cNvPr>
+          <p:cNvSpPr>
+            <a:spLocks noChangeAspect="1" noChangeArrowheads="1"/>
+          </p:cNvSpPr>
+          <p:nvPr/>
+        </p:nvSpPr>
+        <p:spPr bwMode="auto">
+          <a:xfrm>
+            <a:off x="5943600" y="3276600"/>
+            <a:ext cx="304800" cy="304800"/>
           </a:xfrm>
           <a:prstGeom prst="rect">
             <a:avLst/>
           </a:prstGeom>
           <a:noFill/>
+          <a:extLst>
+            <a:ext uri="{909E8E84-426E-40DD-AFC4-6F175D3DCCD1}">
+              <a14:hiddenFill xmlns:a14="http://schemas.microsoft.com/office/drawing/2010/main">
+                <a:solidFill>
+                  <a:srgbClr val="FFFFFF"/>
+                </a:solidFill>
+              </a14:hiddenFill>
+            </a:ext>
+          </a:extLst>
         </p:spPr>
         <p:txBody>
-          <a:bodyPr wrap="square" rtlCol="0">
-            <a:spAutoFit/>
+          <a:bodyPr vert="horz" wrap="square" lIns="91440" tIns="45720" rIns="91440" bIns="45720" numCol="1" anchor="t" anchorCtr="0" compatLnSpc="1">
+            <a:prstTxWarp prst="textNoShape">
+              <a:avLst/>
+            </a:prstTxWarp>
           </a:bodyPr>
           <a:lstStyle/>
           <a:p>
-            <a:pPr marL="342900" indent="-342900">
-              <a:lnSpc>
-                <a:spcPct val="150000"/>
-              </a:lnSpc>
-              <a:spcAft>
-                <a:spcPts val="600"/>
-              </a:spcAft>
-              <a:buFont typeface="+mj-lt"/>
-              <a:buAutoNum type="arabicPeriod"/>
-            </a:pPr>
-            <a:r>
-              <a:rPr lang="en-US" altLang="ko-KR" dirty="0">
-                <a:latin typeface="D2Coding" panose="020B0609020101020101" pitchFamily="49" charset="-127"/>
-                <a:ea typeface="D2Coding" panose="020B0609020101020101" pitchFamily="49" charset="-127"/>
-              </a:rPr>
-              <a:t>What Is Generative Modeling?</a:t>
-            </a:r>
-          </a:p>
-          <a:p>
-            <a:pPr marL="342900" indent="-342900">
-              <a:lnSpc>
-                <a:spcPct val="150000"/>
-              </a:lnSpc>
-              <a:spcAft>
-                <a:spcPts val="600"/>
-              </a:spcAft>
-              <a:buFont typeface="+mj-lt"/>
-              <a:buAutoNum type="arabicPeriod"/>
-            </a:pPr>
-            <a:r>
-              <a:rPr lang="en-US" altLang="ko-KR" dirty="0">
-                <a:latin typeface="D2Coding" panose="020B0609020101020101" pitchFamily="49" charset="-127"/>
-                <a:ea typeface="D2Coding" panose="020B0609020101020101" pitchFamily="49" charset="-127"/>
-              </a:rPr>
-              <a:t>Generative Versus Discriminative Modeling</a:t>
-            </a:r>
-          </a:p>
-          <a:p>
-            <a:pPr marL="342900" indent="-342900">
-              <a:lnSpc>
-                <a:spcPct val="150000"/>
-              </a:lnSpc>
-              <a:spcAft>
-                <a:spcPts val="600"/>
-              </a:spcAft>
-              <a:buFont typeface="+mj-lt"/>
-              <a:buAutoNum type="arabicPeriod"/>
-            </a:pPr>
-            <a:r>
-              <a:rPr lang="en-US" altLang="ko-KR" dirty="0">
-                <a:latin typeface="D2Coding" panose="020B0609020101020101" pitchFamily="49" charset="-127"/>
-                <a:ea typeface="D2Coding" panose="020B0609020101020101" pitchFamily="49" charset="-127"/>
-              </a:rPr>
-              <a:t>Your First Probabilistic Generative Model(Naive Bayes)</a:t>
-            </a:r>
-          </a:p>
-          <a:p>
-            <a:pPr marL="342900" indent="-342900">
-              <a:lnSpc>
-                <a:spcPct val="150000"/>
-              </a:lnSpc>
-              <a:spcAft>
-                <a:spcPts val="600"/>
-              </a:spcAft>
-              <a:buFont typeface="+mj-lt"/>
-              <a:buAutoNum type="arabicPeriod"/>
-            </a:pPr>
-            <a:r>
-              <a:rPr lang="en-US" altLang="ko-KR" dirty="0">
-                <a:latin typeface="D2Coding" panose="020B0609020101020101" pitchFamily="49" charset="-127"/>
-                <a:ea typeface="D2Coding" panose="020B0609020101020101" pitchFamily="49" charset="-127"/>
-              </a:rPr>
-              <a:t>Advances in Machine Learning</a:t>
-            </a:r>
-          </a:p>
-          <a:p>
-            <a:pPr marL="342900" indent="-342900">
-              <a:lnSpc>
-                <a:spcPct val="150000"/>
-              </a:lnSpc>
-              <a:spcAft>
-                <a:spcPts val="600"/>
-              </a:spcAft>
-              <a:buFont typeface="+mj-lt"/>
-              <a:buAutoNum type="arabicPeriod"/>
-            </a:pPr>
-            <a:r>
-              <a:rPr lang="en-US" altLang="ko-KR" dirty="0">
-                <a:latin typeface="D2Coding" panose="020B0609020101020101" pitchFamily="49" charset="-127"/>
-                <a:ea typeface="D2Coding" panose="020B0609020101020101" pitchFamily="49" charset="-127"/>
-              </a:rPr>
-              <a:t>The Rise of Generative Modeling</a:t>
-            </a:r>
-          </a:p>
-          <a:p>
-            <a:pPr marL="342900" indent="-342900">
-              <a:lnSpc>
-                <a:spcPct val="150000"/>
-              </a:lnSpc>
-              <a:spcAft>
-                <a:spcPts val="600"/>
-              </a:spcAft>
-              <a:buFont typeface="+mj-lt"/>
-              <a:buAutoNum type="arabicPeriod"/>
-            </a:pPr>
-            <a:r>
-              <a:rPr lang="en-US" altLang="ko-KR" dirty="0">
-                <a:latin typeface="D2Coding" panose="020B0609020101020101" pitchFamily="49" charset="-127"/>
-                <a:ea typeface="D2Coding" panose="020B0609020101020101" pitchFamily="49" charset="-127"/>
-              </a:rPr>
-              <a:t>The Generative Modeling Framework</a:t>
-            </a:r>
-          </a:p>
-          <a:p>
-            <a:pPr marL="342900" indent="-342900">
-              <a:lnSpc>
-                <a:spcPct val="150000"/>
-              </a:lnSpc>
-              <a:spcAft>
-                <a:spcPts val="600"/>
-              </a:spcAft>
-              <a:buFont typeface="+mj-lt"/>
-              <a:buAutoNum type="arabicPeriod"/>
-            </a:pPr>
-            <a:r>
-              <a:rPr lang="en-US" altLang="ko-KR" dirty="0">
-                <a:latin typeface="D2Coding" panose="020B0609020101020101" pitchFamily="49" charset="-127"/>
-                <a:ea typeface="D2Coding" panose="020B0609020101020101" pitchFamily="49" charset="-127"/>
-              </a:rPr>
-              <a:t>Probabilistic Generative Models</a:t>
-            </a:r>
-          </a:p>
-          <a:p>
-            <a:pPr marL="342900" indent="-342900">
-              <a:lnSpc>
-                <a:spcPct val="150000"/>
-              </a:lnSpc>
-              <a:spcAft>
-                <a:spcPts val="600"/>
-              </a:spcAft>
-              <a:buFont typeface="+mj-lt"/>
-              <a:buAutoNum type="arabicPeriod"/>
-            </a:pPr>
-            <a:r>
-              <a:rPr lang="en-US" altLang="ko-KR" dirty="0">
-                <a:latin typeface="D2Coding" panose="020B0609020101020101" pitchFamily="49" charset="-127"/>
-                <a:ea typeface="D2Coding" panose="020B0609020101020101" pitchFamily="49" charset="-127"/>
-              </a:rPr>
-              <a:t>Hello </a:t>
-            </a:r>
-            <a:r>
-              <a:rPr lang="en-US" altLang="ko-KR" dirty="0" err="1">
-                <a:latin typeface="D2Coding" panose="020B0609020101020101" pitchFamily="49" charset="-127"/>
-                <a:ea typeface="D2Coding" panose="020B0609020101020101" pitchFamily="49" charset="-127"/>
-              </a:rPr>
-              <a:t>Wrodl</a:t>
-            </a:r>
-            <a:r>
-              <a:rPr lang="en-US" altLang="ko-KR" dirty="0">
-                <a:latin typeface="D2Coding" panose="020B0609020101020101" pitchFamily="49" charset="-127"/>
-                <a:ea typeface="D2Coding" panose="020B0609020101020101" pitchFamily="49" charset="-127"/>
-              </a:rPr>
-              <a:t>!</a:t>
-            </a:r>
-          </a:p>
-          <a:p>
-            <a:pPr marL="342900" indent="-342900">
-              <a:lnSpc>
-                <a:spcPct val="150000"/>
-              </a:lnSpc>
-              <a:spcAft>
-                <a:spcPts val="600"/>
-              </a:spcAft>
-              <a:buFont typeface="+mj-lt"/>
-              <a:buAutoNum type="arabicPeriod"/>
-            </a:pPr>
-            <a:r>
-              <a:rPr lang="en-US" altLang="ko-KR" dirty="0">
-                <a:latin typeface="D2Coding" panose="020B0609020101020101" pitchFamily="49" charset="-127"/>
-                <a:ea typeface="D2Coding" panose="020B0609020101020101" pitchFamily="49" charset="-127"/>
-              </a:rPr>
-              <a:t>The Challenges of Generative Modeling</a:t>
-            </a:r>
+            <a:endParaRPr lang="ko-KR" altLang="en-US"/>
           </a:p>
         </p:txBody>
       </p:sp>
       <p:pic>
         <p:nvPicPr>
-          <p:cNvPr id="5" name="그림 4">
+          <p:cNvPr id="6" name="그림 5">
             <a:extLst>
               <a:ext uri="{FF2B5EF4-FFF2-40B4-BE49-F238E27FC236}">
-                <a16:creationId xmlns:a16="http://schemas.microsoft.com/office/drawing/2014/main" id="{9DFE417F-6456-80EE-F8CF-CA255ABD9287}"/>
+                <a16:creationId xmlns:a16="http://schemas.microsoft.com/office/drawing/2014/main" id="{599FBBEA-C468-C545-FBF3-20D7ADEEBAF3}"/>
               </a:ext>
             </a:extLst>
           </p:cNvPr>
@@ -7343,18 +7333,135 @@
         </p:blipFill>
         <p:spPr>
           <a:xfrm>
-            <a:off x="9986948" y="1478753"/>
-            <a:ext cx="1684918" cy="2232705"/>
+            <a:off x="2187597" y="2157896"/>
+            <a:ext cx="7512005" cy="4128604"/>
           </a:xfrm>
           <a:prstGeom prst="rect">
             <a:avLst/>
           </a:prstGeom>
         </p:spPr>
       </p:pic>
+      <p:sp>
+        <p:nvSpPr>
+          <p:cNvPr id="8" name="TextBox 7">
+            <a:extLst>
+              <a:ext uri="{FF2B5EF4-FFF2-40B4-BE49-F238E27FC236}">
+                <a16:creationId xmlns:a16="http://schemas.microsoft.com/office/drawing/2014/main" id="{087BBBC7-A1B5-0ACE-049B-6B45422A6073}"/>
+              </a:ext>
+            </a:extLst>
+          </p:cNvPr>
+          <p:cNvSpPr txBox="1"/>
+          <p:nvPr/>
+        </p:nvSpPr>
+        <p:spPr>
+          <a:xfrm>
+            <a:off x="630265" y="1205526"/>
+            <a:ext cx="11028335" cy="793166"/>
+          </a:xfrm>
+          <a:prstGeom prst="rect">
+            <a:avLst/>
+          </a:prstGeom>
+          <a:noFill/>
+        </p:spPr>
+        <p:txBody>
+          <a:bodyPr wrap="square">
+            <a:spAutoFit/>
+          </a:bodyPr>
+          <a:lstStyle/>
+          <a:p>
+            <a:pPr>
+              <a:lnSpc>
+                <a:spcPct val="150000"/>
+              </a:lnSpc>
+            </a:pPr>
+            <a:r>
+              <a:rPr lang="en-US" altLang="ko-KR" sz="1600" dirty="0">
+                <a:latin typeface="D2Coding" panose="020B0609020101020101" pitchFamily="49" charset="-127"/>
+                <a:ea typeface="D2Coding" panose="020B0609020101020101" pitchFamily="49" charset="-127"/>
+              </a:rPr>
+              <a:t>N = 50 observations of fashions described by five features, (</a:t>
+            </a:r>
+            <a:r>
+              <a:rPr lang="en-US" altLang="ko-KR" sz="1600" dirty="0" err="1">
+                <a:latin typeface="D2Coding" panose="020B0609020101020101" pitchFamily="49" charset="-127"/>
+                <a:ea typeface="D2Coding" panose="020B0609020101020101" pitchFamily="49" charset="-127"/>
+              </a:rPr>
+              <a:t>accessoriesType</a:t>
+            </a:r>
+            <a:r>
+              <a:rPr lang="en-US" altLang="ko-KR" sz="1600" dirty="0">
+                <a:latin typeface="D2Coding" panose="020B0609020101020101" pitchFamily="49" charset="-127"/>
+                <a:ea typeface="D2Coding" panose="020B0609020101020101" pitchFamily="49" charset="-127"/>
+              </a:rPr>
+              <a:t>, </a:t>
+            </a:r>
+            <a:r>
+              <a:rPr lang="en-US" altLang="ko-KR" sz="1600" dirty="0" err="1">
+                <a:latin typeface="D2Coding" panose="020B0609020101020101" pitchFamily="49" charset="-127"/>
+                <a:ea typeface="D2Coding" panose="020B0609020101020101" pitchFamily="49" charset="-127"/>
+              </a:rPr>
+              <a:t>clothingColor</a:t>
+            </a:r>
+            <a:r>
+              <a:rPr lang="en-US" altLang="ko-KR" sz="1600" dirty="0">
+                <a:latin typeface="D2Coding" panose="020B0609020101020101" pitchFamily="49" charset="-127"/>
+                <a:ea typeface="D2Coding" panose="020B0609020101020101" pitchFamily="49" charset="-127"/>
+              </a:rPr>
+              <a:t>, </a:t>
+            </a:r>
+            <a:r>
+              <a:rPr lang="en-US" altLang="ko-KR" sz="1600" dirty="0" err="1">
+                <a:latin typeface="D2Coding" panose="020B0609020101020101" pitchFamily="49" charset="-127"/>
+                <a:ea typeface="D2Coding" panose="020B0609020101020101" pitchFamily="49" charset="-127"/>
+              </a:rPr>
+              <a:t>clothingType</a:t>
+            </a:r>
+            <a:r>
+              <a:rPr lang="en-US" altLang="ko-KR" sz="1600" dirty="0">
+                <a:latin typeface="D2Coding" panose="020B0609020101020101" pitchFamily="49" charset="-127"/>
+                <a:ea typeface="D2Coding" panose="020B0609020101020101" pitchFamily="49" charset="-127"/>
+              </a:rPr>
+              <a:t>, </a:t>
+            </a:r>
+            <a:r>
+              <a:rPr lang="en-US" altLang="ko-KR" sz="1600" dirty="0" err="1">
+                <a:latin typeface="D2Coding" panose="020B0609020101020101" pitchFamily="49" charset="-127"/>
+                <a:ea typeface="D2Coding" panose="020B0609020101020101" pitchFamily="49" charset="-127"/>
+              </a:rPr>
+              <a:t>hairColor</a:t>
+            </a:r>
+            <a:r>
+              <a:rPr lang="en-US" altLang="ko-KR" sz="1600" dirty="0">
+                <a:latin typeface="D2Coding" panose="020B0609020101020101" pitchFamily="49" charset="-127"/>
+                <a:ea typeface="D2Coding" panose="020B0609020101020101" pitchFamily="49" charset="-127"/>
+              </a:rPr>
+              <a:t>, </a:t>
+            </a:r>
+            <a:r>
+              <a:rPr lang="en-US" altLang="ko-KR" sz="1600" dirty="0" err="1">
+                <a:latin typeface="D2Coding" panose="020B0609020101020101" pitchFamily="49" charset="-127"/>
+                <a:ea typeface="D2Coding" panose="020B0609020101020101" pitchFamily="49" charset="-127"/>
+              </a:rPr>
+              <a:t>topType</a:t>
+            </a:r>
+            <a:r>
+              <a:rPr lang="en-US" altLang="ko-KR" sz="1600" dirty="0">
+                <a:latin typeface="D2Coding" panose="020B0609020101020101" pitchFamily="49" charset="-127"/>
+                <a:ea typeface="D2Coding" panose="020B0609020101020101" pitchFamily="49" charset="-127"/>
+              </a:rPr>
+              <a:t>)</a:t>
+            </a:r>
+            <a:endParaRPr lang="ko-KR" altLang="en-US" sz="1600" dirty="0">
+              <a:latin typeface="D2Coding" panose="020B0609020101020101" pitchFamily="49" charset="-127"/>
+              <a:ea typeface="D2Coding" panose="020B0609020101020101" pitchFamily="49" charset="-127"/>
+            </a:endParaRPr>
+          </a:p>
+        </p:txBody>
+      </p:sp>
     </p:spTree>
     <p:extLst>
       <p:ext uri="{BB962C8B-B14F-4D97-AF65-F5344CB8AC3E}">
-        <p14:creationId xmlns:p14="http://schemas.microsoft.com/office/powerpoint/2010/main" val="257885917"/>
+        <p14:creationId xmlns:p14="http://schemas.microsoft.com/office/powerpoint/2010/main" val="2916385858"/>
       </p:ext>
     </p:extLst>
   </p:cSld>
@@ -7671,7 +7778,7 @@
                 <a:latin typeface="D2Coding" panose="020B0609020101020101" pitchFamily="49" charset="-127"/>
                 <a:ea typeface="D2Coding" panose="020B0609020101020101" pitchFamily="49" charset="-127"/>
               </a:rPr>
-              <a:t>The Challenges of Generative Modeling</a:t>
+              <a:t>Manifold Learning</a:t>
             </a:r>
           </a:p>
         </p:txBody>
@@ -7720,464 +7827,6 @@
 </file>
 
 <file path=ppt/slides/slide20.xml><?xml version="1.0" encoding="utf-8"?>
-<p:sld xmlns:a="http://schemas.openxmlformats.org/drawingml/2006/main" xmlns:r="http://schemas.openxmlformats.org/officeDocument/2006/relationships" xmlns:p="http://schemas.openxmlformats.org/presentationml/2006/main">
-  <p:cSld>
-    <p:spTree>
-      <p:nvGrpSpPr>
-        <p:cNvPr id="1" name="">
-          <a:extLst>
-            <a:ext uri="{FF2B5EF4-FFF2-40B4-BE49-F238E27FC236}">
-              <a16:creationId xmlns:a16="http://schemas.microsoft.com/office/drawing/2014/main" id="{94B84F52-3789-EEC2-F35F-2D16440A7E06}"/>
-            </a:ext>
-          </a:extLst>
-        </p:cNvPr>
-        <p:cNvGrpSpPr/>
-        <p:nvPr/>
-      </p:nvGrpSpPr>
-      <p:grpSpPr>
-        <a:xfrm>
-          <a:off x="0" y="0"/>
-          <a:ext cx="0" cy="0"/>
-          <a:chOff x="0" y="0"/>
-          <a:chExt cx="0" cy="0"/>
-        </a:xfrm>
-      </p:grpSpPr>
-      <p:sp>
-        <p:nvSpPr>
-          <p:cNvPr id="3" name="제목 1">
-            <a:extLst>
-              <a:ext uri="{FF2B5EF4-FFF2-40B4-BE49-F238E27FC236}">
-                <a16:creationId xmlns:a16="http://schemas.microsoft.com/office/drawing/2014/main" id="{E52B1B47-6798-59C1-02C0-78A40F43FE41}"/>
-              </a:ext>
-            </a:extLst>
-          </p:cNvPr>
-          <p:cNvSpPr txBox="1">
-            <a:spLocks/>
-          </p:cNvSpPr>
-          <p:nvPr/>
-        </p:nvSpPr>
-        <p:spPr>
-          <a:xfrm>
-            <a:off x="475645" y="481983"/>
-            <a:ext cx="10353762" cy="766439"/>
-          </a:xfrm>
-          <a:prstGeom prst="rect">
-            <a:avLst/>
-          </a:prstGeom>
-        </p:spPr>
-        <p:txBody>
-          <a:bodyPr vert="horz" lIns="91440" tIns="45720" rIns="91440" bIns="45720" rtlCol="0" anchor="ctr">
-            <a:normAutofit/>
-          </a:bodyPr>
-          <a:lstStyle>
-            <a:lvl1pPr algn="ctr" defTabSz="914400" rtl="0" eaLnBrk="1" latinLnBrk="1" hangingPunct="1">
-              <a:lnSpc>
-                <a:spcPct val="90000"/>
-              </a:lnSpc>
-              <a:spcBef>
-                <a:spcPct val="0"/>
-              </a:spcBef>
-              <a:buNone/>
-              <a:defRPr sz="3200" kern="1200" cap="all" baseline="0">
-                <a:solidFill>
-                  <a:schemeClr val="tx1"/>
-                </a:solidFill>
-                <a:effectLst/>
-                <a:latin typeface="Batang" panose="02030600000101010101" pitchFamily="18" charset="-127"/>
-                <a:ea typeface="Batang" panose="02030600000101010101" pitchFamily="18" charset="-127"/>
-                <a:cs typeface="+mj-cs"/>
-              </a:defRPr>
-            </a:lvl1pPr>
-          </a:lstStyle>
-          <a:p>
-            <a:pPr algn="l"/>
-            <a:r>
-              <a:rPr lang="en-US" altLang="ko-KR" sz="2800" cap="none" dirty="0">
-                <a:solidFill>
-                  <a:schemeClr val="bg2">
-                    <a:lumMod val="25000"/>
-                  </a:schemeClr>
-                </a:solidFill>
-                <a:latin typeface="D2Coding" panose="020B0609020101020101" pitchFamily="49" charset="-127"/>
-                <a:ea typeface="D2Coding" panose="020B0609020101020101" pitchFamily="49" charset="-127"/>
-                <a:cs typeface="Segoe UI Light" panose="020B0502040204020203" pitchFamily="34" charset="0"/>
-              </a:rPr>
-              <a:t>Hello </a:t>
-            </a:r>
-            <a:r>
-              <a:rPr lang="en-US" altLang="ko-KR" sz="2800" cap="none" dirty="0" err="1">
-                <a:solidFill>
-                  <a:schemeClr val="bg2">
-                    <a:lumMod val="25000"/>
-                  </a:schemeClr>
-                </a:solidFill>
-                <a:latin typeface="D2Coding" panose="020B0609020101020101" pitchFamily="49" charset="-127"/>
-                <a:ea typeface="D2Coding" panose="020B0609020101020101" pitchFamily="49" charset="-127"/>
-                <a:cs typeface="Segoe UI Light" panose="020B0502040204020203" pitchFamily="34" charset="0"/>
-              </a:rPr>
-              <a:t>Wrodl</a:t>
-            </a:r>
-            <a:r>
-              <a:rPr lang="en-US" altLang="ko-KR" sz="2800" cap="none" dirty="0">
-                <a:solidFill>
-                  <a:schemeClr val="bg2">
-                    <a:lumMod val="25000"/>
-                  </a:schemeClr>
-                </a:solidFill>
-                <a:latin typeface="D2Coding" panose="020B0609020101020101" pitchFamily="49" charset="-127"/>
-                <a:ea typeface="D2Coding" panose="020B0609020101020101" pitchFamily="49" charset="-127"/>
-                <a:cs typeface="Segoe UI Light" panose="020B0502040204020203" pitchFamily="34" charset="0"/>
-              </a:rPr>
-              <a:t>!</a:t>
-            </a:r>
-          </a:p>
-        </p:txBody>
-      </p:sp>
-      <p:sp>
-        <p:nvSpPr>
-          <p:cNvPr id="51" name="슬라이드 번호 개체 틀 3">
-            <a:extLst>
-              <a:ext uri="{FF2B5EF4-FFF2-40B4-BE49-F238E27FC236}">
-                <a16:creationId xmlns:a16="http://schemas.microsoft.com/office/drawing/2014/main" id="{B95896C3-E642-4C49-D016-D0735075C166}"/>
-              </a:ext>
-            </a:extLst>
-          </p:cNvPr>
-          <p:cNvSpPr txBox="1">
-            <a:spLocks/>
-          </p:cNvSpPr>
-          <p:nvPr/>
-        </p:nvSpPr>
-        <p:spPr>
-          <a:xfrm>
-            <a:off x="11180761" y="299420"/>
-            <a:ext cx="753545" cy="365125"/>
-          </a:xfrm>
-          <a:prstGeom prst="rect">
-            <a:avLst/>
-          </a:prstGeom>
-        </p:spPr>
-        <p:txBody>
-          <a:bodyPr vert="horz" lIns="91440" tIns="45720" rIns="91440" bIns="45720" rtlCol="0" anchor="ctr"/>
-          <a:lstStyle>
-            <a:defPPr rtl="0">
-              <a:defRPr lang="ko-KR"/>
-            </a:defPPr>
-            <a:lvl1pPr marL="0" algn="r" defTabSz="914400" rtl="0" eaLnBrk="1" latinLnBrk="0" hangingPunct="1">
-              <a:defRPr sz="1200" kern="1200" baseline="0">
-                <a:solidFill>
-                  <a:schemeClr val="tx1">
-                    <a:lumMod val="65000"/>
-                    <a:lumOff val="35000"/>
-                  </a:schemeClr>
-                </a:solidFill>
-                <a:latin typeface="맑은 고딕" panose="020B0503020000020004" pitchFamily="50" charset="-127"/>
-                <a:ea typeface="맑은 고딕" panose="020B0503020000020004" pitchFamily="50" charset="-127"/>
-                <a:cs typeface="+mn-cs"/>
-              </a:defRPr>
-            </a:lvl1pPr>
-            <a:lvl2pPr marL="457200" algn="l" defTabSz="914400" rtl="0" eaLnBrk="1" latinLnBrk="0" hangingPunct="1">
-              <a:defRPr sz="1800" kern="1200">
-                <a:solidFill>
-                  <a:schemeClr val="tx1"/>
-                </a:solidFill>
-                <a:latin typeface="+mn-lt"/>
-                <a:ea typeface="+mn-ea"/>
-                <a:cs typeface="+mn-cs"/>
-              </a:defRPr>
-            </a:lvl2pPr>
-            <a:lvl3pPr marL="914400" algn="l" defTabSz="914400" rtl="0" eaLnBrk="1" latinLnBrk="0" hangingPunct="1">
-              <a:defRPr sz="1800" kern="1200">
-                <a:solidFill>
-                  <a:schemeClr val="tx1"/>
-                </a:solidFill>
-                <a:latin typeface="+mn-lt"/>
-                <a:ea typeface="+mn-ea"/>
-                <a:cs typeface="+mn-cs"/>
-              </a:defRPr>
-            </a:lvl3pPr>
-            <a:lvl4pPr marL="1371600" algn="l" defTabSz="914400" rtl="0" eaLnBrk="1" latinLnBrk="0" hangingPunct="1">
-              <a:defRPr sz="1800" kern="1200">
-                <a:solidFill>
-                  <a:schemeClr val="tx1"/>
-                </a:solidFill>
-                <a:latin typeface="+mn-lt"/>
-                <a:ea typeface="+mn-ea"/>
-                <a:cs typeface="+mn-cs"/>
-              </a:defRPr>
-            </a:lvl4pPr>
-            <a:lvl5pPr marL="1828800" algn="l" defTabSz="914400" rtl="0" eaLnBrk="1" latinLnBrk="0" hangingPunct="1">
-              <a:defRPr sz="1800" kern="1200">
-                <a:solidFill>
-                  <a:schemeClr val="tx1"/>
-                </a:solidFill>
-                <a:latin typeface="+mn-lt"/>
-                <a:ea typeface="+mn-ea"/>
-                <a:cs typeface="+mn-cs"/>
-              </a:defRPr>
-            </a:lvl5pPr>
-            <a:lvl6pPr marL="2286000" algn="l" defTabSz="914400" rtl="0" eaLnBrk="1" latinLnBrk="0" hangingPunct="1">
-              <a:defRPr sz="1800" kern="1200">
-                <a:solidFill>
-                  <a:schemeClr val="tx1"/>
-                </a:solidFill>
-                <a:latin typeface="+mn-lt"/>
-                <a:ea typeface="+mn-ea"/>
-                <a:cs typeface="+mn-cs"/>
-              </a:defRPr>
-            </a:lvl6pPr>
-            <a:lvl7pPr marL="2743200" algn="l" defTabSz="914400" rtl="0" eaLnBrk="1" latinLnBrk="0" hangingPunct="1">
-              <a:defRPr sz="1800" kern="1200">
-                <a:solidFill>
-                  <a:schemeClr val="tx1"/>
-                </a:solidFill>
-                <a:latin typeface="+mn-lt"/>
-                <a:ea typeface="+mn-ea"/>
-                <a:cs typeface="+mn-cs"/>
-              </a:defRPr>
-            </a:lvl7pPr>
-            <a:lvl8pPr marL="3200400" algn="l" defTabSz="914400" rtl="0" eaLnBrk="1" latinLnBrk="0" hangingPunct="1">
-              <a:defRPr sz="1800" kern="1200">
-                <a:solidFill>
-                  <a:schemeClr val="tx1"/>
-                </a:solidFill>
-                <a:latin typeface="+mn-lt"/>
-                <a:ea typeface="+mn-ea"/>
-                <a:cs typeface="+mn-cs"/>
-              </a:defRPr>
-            </a:lvl8pPr>
-            <a:lvl9pPr marL="3657600" algn="l" defTabSz="914400" rtl="0" eaLnBrk="1" latinLnBrk="0" hangingPunct="1">
-              <a:defRPr sz="1800" kern="1200">
-                <a:solidFill>
-                  <a:schemeClr val="tx1"/>
-                </a:solidFill>
-                <a:latin typeface="+mn-lt"/>
-                <a:ea typeface="+mn-ea"/>
-                <a:cs typeface="+mn-cs"/>
-              </a:defRPr>
-            </a:lvl9pPr>
-          </a:lstStyle>
-          <a:p>
-            <a:fld id="{D57F1E4F-1CFF-5643-939E-217C01CDF565}" type="slidenum">
-              <a:rPr lang="en-US" b="1" smtClean="0">
-                <a:latin typeface="Segoe UI Emoji" panose="020B0502040204020203" pitchFamily="34" charset="0"/>
-                <a:ea typeface="Segoe UI Emoji" panose="020B0502040204020203" pitchFamily="34" charset="0"/>
-              </a:rPr>
-              <a:pPr/>
-              <a:t>20</a:t>
-            </a:fld>
-            <a:endParaRPr lang="en-US" b="1" dirty="0">
-              <a:latin typeface="Segoe UI Emoji" panose="020B0502040204020203" pitchFamily="34" charset="0"/>
-              <a:ea typeface="Segoe UI Emoji" panose="020B0502040204020203" pitchFamily="34" charset="0"/>
-            </a:endParaRPr>
-          </a:p>
-        </p:txBody>
-      </p:sp>
-      <p:sp>
-        <p:nvSpPr>
-          <p:cNvPr id="2" name="AutoShape 2">
-            <a:extLst>
-              <a:ext uri="{FF2B5EF4-FFF2-40B4-BE49-F238E27FC236}">
-                <a16:creationId xmlns:a16="http://schemas.microsoft.com/office/drawing/2014/main" id="{C6971E7F-CB7B-410C-E673-99AE6B74C05E}"/>
-              </a:ext>
-            </a:extLst>
-          </p:cNvPr>
-          <p:cNvSpPr>
-            <a:spLocks noChangeAspect="1" noChangeArrowheads="1"/>
-          </p:cNvSpPr>
-          <p:nvPr/>
-        </p:nvSpPr>
-        <p:spPr bwMode="auto">
-          <a:xfrm>
-            <a:off x="5943600" y="3276600"/>
-            <a:ext cx="304800" cy="304800"/>
-          </a:xfrm>
-          <a:prstGeom prst="rect">
-            <a:avLst/>
-          </a:prstGeom>
-          <a:noFill/>
-          <a:extLst>
-            <a:ext uri="{909E8E84-426E-40DD-AFC4-6F175D3DCCD1}">
-              <a14:hiddenFill xmlns:a14="http://schemas.microsoft.com/office/drawing/2010/main">
-                <a:solidFill>
-                  <a:srgbClr val="FFFFFF"/>
-                </a:solidFill>
-              </a14:hiddenFill>
-            </a:ext>
-          </a:extLst>
-        </p:spPr>
-        <p:txBody>
-          <a:bodyPr vert="horz" wrap="square" lIns="91440" tIns="45720" rIns="91440" bIns="45720" numCol="1" anchor="t" anchorCtr="0" compatLnSpc="1">
-            <a:prstTxWarp prst="textNoShape">
-              <a:avLst/>
-            </a:prstTxWarp>
-          </a:bodyPr>
-          <a:lstStyle/>
-          <a:p>
-            <a:endParaRPr lang="ko-KR" altLang="en-US"/>
-          </a:p>
-        </p:txBody>
-      </p:sp>
-      <p:pic>
-        <p:nvPicPr>
-          <p:cNvPr id="6" name="그림 5">
-            <a:extLst>
-              <a:ext uri="{FF2B5EF4-FFF2-40B4-BE49-F238E27FC236}">
-                <a16:creationId xmlns:a16="http://schemas.microsoft.com/office/drawing/2014/main" id="{599FBBEA-C468-C545-FBF3-20D7ADEEBAF3}"/>
-              </a:ext>
-            </a:extLst>
-          </p:cNvPr>
-          <p:cNvPicPr>
-            <a:picLocks noChangeAspect="1"/>
-          </p:cNvPicPr>
-          <p:nvPr/>
-        </p:nvPicPr>
-        <p:blipFill>
-          <a:blip r:embed="rId2"/>
-          <a:stretch>
-            <a:fillRect/>
-          </a:stretch>
-        </p:blipFill>
-        <p:spPr>
-          <a:xfrm>
-            <a:off x="2187597" y="2157896"/>
-            <a:ext cx="7512005" cy="4128604"/>
-          </a:xfrm>
-          <a:prstGeom prst="rect">
-            <a:avLst/>
-          </a:prstGeom>
-        </p:spPr>
-      </p:pic>
-      <p:sp>
-        <p:nvSpPr>
-          <p:cNvPr id="8" name="TextBox 7">
-            <a:extLst>
-              <a:ext uri="{FF2B5EF4-FFF2-40B4-BE49-F238E27FC236}">
-                <a16:creationId xmlns:a16="http://schemas.microsoft.com/office/drawing/2014/main" id="{087BBBC7-A1B5-0ACE-049B-6B45422A6073}"/>
-              </a:ext>
-            </a:extLst>
-          </p:cNvPr>
-          <p:cNvSpPr txBox="1"/>
-          <p:nvPr/>
-        </p:nvSpPr>
-        <p:spPr>
-          <a:xfrm>
-            <a:off x="630265" y="1205526"/>
-            <a:ext cx="11028335" cy="793166"/>
-          </a:xfrm>
-          <a:prstGeom prst="rect">
-            <a:avLst/>
-          </a:prstGeom>
-          <a:noFill/>
-        </p:spPr>
-        <p:txBody>
-          <a:bodyPr wrap="square">
-            <a:spAutoFit/>
-          </a:bodyPr>
-          <a:lstStyle/>
-          <a:p>
-            <a:pPr>
-              <a:lnSpc>
-                <a:spcPct val="150000"/>
-              </a:lnSpc>
-            </a:pPr>
-            <a:r>
-              <a:rPr lang="en-US" altLang="ko-KR" sz="1600" dirty="0">
-                <a:latin typeface="D2Coding" panose="020B0609020101020101" pitchFamily="49" charset="-127"/>
-                <a:ea typeface="D2Coding" panose="020B0609020101020101" pitchFamily="49" charset="-127"/>
-              </a:rPr>
-              <a:t>N = 50 observations of fashions described by five features, (</a:t>
-            </a:r>
-            <a:r>
-              <a:rPr lang="en-US" altLang="ko-KR" sz="1600" dirty="0" err="1">
-                <a:latin typeface="D2Coding" panose="020B0609020101020101" pitchFamily="49" charset="-127"/>
-                <a:ea typeface="D2Coding" panose="020B0609020101020101" pitchFamily="49" charset="-127"/>
-              </a:rPr>
-              <a:t>accessoriesType</a:t>
-            </a:r>
-            <a:r>
-              <a:rPr lang="en-US" altLang="ko-KR" sz="1600" dirty="0">
-                <a:latin typeface="D2Coding" panose="020B0609020101020101" pitchFamily="49" charset="-127"/>
-                <a:ea typeface="D2Coding" panose="020B0609020101020101" pitchFamily="49" charset="-127"/>
-              </a:rPr>
-              <a:t>, </a:t>
-            </a:r>
-            <a:r>
-              <a:rPr lang="en-US" altLang="ko-KR" sz="1600" dirty="0" err="1">
-                <a:latin typeface="D2Coding" panose="020B0609020101020101" pitchFamily="49" charset="-127"/>
-                <a:ea typeface="D2Coding" panose="020B0609020101020101" pitchFamily="49" charset="-127"/>
-              </a:rPr>
-              <a:t>clothingColor</a:t>
-            </a:r>
-            <a:r>
-              <a:rPr lang="en-US" altLang="ko-KR" sz="1600" dirty="0">
-                <a:latin typeface="D2Coding" panose="020B0609020101020101" pitchFamily="49" charset="-127"/>
-                <a:ea typeface="D2Coding" panose="020B0609020101020101" pitchFamily="49" charset="-127"/>
-              </a:rPr>
-              <a:t>, </a:t>
-            </a:r>
-            <a:r>
-              <a:rPr lang="en-US" altLang="ko-KR" sz="1600" dirty="0" err="1">
-                <a:latin typeface="D2Coding" panose="020B0609020101020101" pitchFamily="49" charset="-127"/>
-                <a:ea typeface="D2Coding" panose="020B0609020101020101" pitchFamily="49" charset="-127"/>
-              </a:rPr>
-              <a:t>clothingType</a:t>
-            </a:r>
-            <a:r>
-              <a:rPr lang="en-US" altLang="ko-KR" sz="1600" dirty="0">
-                <a:latin typeface="D2Coding" panose="020B0609020101020101" pitchFamily="49" charset="-127"/>
-                <a:ea typeface="D2Coding" panose="020B0609020101020101" pitchFamily="49" charset="-127"/>
-              </a:rPr>
-              <a:t>, </a:t>
-            </a:r>
-            <a:r>
-              <a:rPr lang="en-US" altLang="ko-KR" sz="1600" dirty="0" err="1">
-                <a:latin typeface="D2Coding" panose="020B0609020101020101" pitchFamily="49" charset="-127"/>
-                <a:ea typeface="D2Coding" panose="020B0609020101020101" pitchFamily="49" charset="-127"/>
-              </a:rPr>
-              <a:t>hairColor</a:t>
-            </a:r>
-            <a:r>
-              <a:rPr lang="en-US" altLang="ko-KR" sz="1600" dirty="0">
-                <a:latin typeface="D2Coding" panose="020B0609020101020101" pitchFamily="49" charset="-127"/>
-                <a:ea typeface="D2Coding" panose="020B0609020101020101" pitchFamily="49" charset="-127"/>
-              </a:rPr>
-              <a:t>, </a:t>
-            </a:r>
-            <a:r>
-              <a:rPr lang="en-US" altLang="ko-KR" sz="1600" dirty="0" err="1">
-                <a:latin typeface="D2Coding" panose="020B0609020101020101" pitchFamily="49" charset="-127"/>
-                <a:ea typeface="D2Coding" panose="020B0609020101020101" pitchFamily="49" charset="-127"/>
-              </a:rPr>
-              <a:t>topType</a:t>
-            </a:r>
-            <a:r>
-              <a:rPr lang="en-US" altLang="ko-KR" sz="1600" dirty="0">
-                <a:latin typeface="D2Coding" panose="020B0609020101020101" pitchFamily="49" charset="-127"/>
-                <a:ea typeface="D2Coding" panose="020B0609020101020101" pitchFamily="49" charset="-127"/>
-              </a:rPr>
-              <a:t>)</a:t>
-            </a:r>
-            <a:endParaRPr lang="ko-KR" altLang="en-US" sz="1600" dirty="0">
-              <a:latin typeface="D2Coding" panose="020B0609020101020101" pitchFamily="49" charset="-127"/>
-              <a:ea typeface="D2Coding" panose="020B0609020101020101" pitchFamily="49" charset="-127"/>
-            </a:endParaRPr>
-          </a:p>
-        </p:txBody>
-      </p:sp>
-    </p:spTree>
-    <p:extLst>
-      <p:ext uri="{BB962C8B-B14F-4D97-AF65-F5344CB8AC3E}">
-        <p14:creationId xmlns:p14="http://schemas.microsoft.com/office/powerpoint/2010/main" val="2916385858"/>
-      </p:ext>
-    </p:extLst>
-  </p:cSld>
-  <p:clrMapOvr>
-    <a:masterClrMapping/>
-  </p:clrMapOvr>
-</p:sld>
-</file>
-
-<file path=ppt/slides/slide21.xml><?xml version="1.0" encoding="utf-8"?>
 <p:sld xmlns:a="http://schemas.openxmlformats.org/drawingml/2006/main" xmlns:r="http://schemas.openxmlformats.org/officeDocument/2006/relationships" xmlns:p="http://schemas.openxmlformats.org/presentationml/2006/main">
   <p:cSld>
     <p:spTree>
@@ -8421,7 +8070,7 @@
                 <a:ea typeface="Segoe UI Emoji" panose="020B0502040204020203" pitchFamily="34" charset="0"/>
               </a:rPr>
               <a:pPr/>
-              <a:t>21</a:t>
+              <a:t>20</a:t>
             </a:fld>
             <a:endParaRPr lang="en-US" b="1" dirty="0">
               <a:latin typeface="Segoe UI Emoji" panose="020B0502040204020203" pitchFamily="34" charset="0"/>
@@ -8598,7 +8247,7 @@
 </p:sld>
 </file>
 
-<file path=ppt/slides/slide22.xml><?xml version="1.0" encoding="utf-8"?>
+<file path=ppt/slides/slide21.xml><?xml version="1.0" encoding="utf-8"?>
 <p:sld xmlns:a="http://schemas.openxmlformats.org/drawingml/2006/main" xmlns:r="http://schemas.openxmlformats.org/officeDocument/2006/relationships" xmlns:p="http://schemas.openxmlformats.org/presentationml/2006/main">
   <p:cSld>
     <p:spTree>
@@ -8842,7 +8491,7 @@
                 <a:ea typeface="Segoe UI Emoji" panose="020B0502040204020203" pitchFamily="34" charset="0"/>
               </a:rPr>
               <a:pPr/>
-              <a:t>22</a:t>
+              <a:t>21</a:t>
             </a:fld>
             <a:endParaRPr lang="en-US" b="1" dirty="0">
               <a:latin typeface="Segoe UI Emoji" panose="020B0502040204020203" pitchFamily="34" charset="0"/>
@@ -9019,7 +8668,7 @@
 </p:sld>
 </file>
 
-<file path=ppt/slides/slide23.xml><?xml version="1.0" encoding="utf-8"?>
+<file path=ppt/slides/slide22.xml><?xml version="1.0" encoding="utf-8"?>
 <p:sld xmlns:a="http://schemas.openxmlformats.org/drawingml/2006/main" xmlns:r="http://schemas.openxmlformats.org/officeDocument/2006/relationships" xmlns:p="http://schemas.openxmlformats.org/presentationml/2006/main">
   <p:cSld>
     <p:spTree>
@@ -9263,7 +8912,7 @@
                 <a:ea typeface="Segoe UI Emoji" panose="020B0502040204020203" pitchFamily="34" charset="0"/>
               </a:rPr>
               <a:pPr/>
-              <a:t>23</a:t>
+              <a:t>22</a:t>
             </a:fld>
             <a:endParaRPr lang="en-US" b="1" dirty="0">
               <a:latin typeface="Segoe UI Emoji" panose="020B0502040204020203" pitchFamily="34" charset="0"/>
@@ -9643,7 +9292,7 @@
 </p:sld>
 </file>
 
-<file path=ppt/slides/slide24.xml><?xml version="1.0" encoding="utf-8"?>
+<file path=ppt/slides/slide23.xml><?xml version="1.0" encoding="utf-8"?>
 <p:sld xmlns:a="http://schemas.openxmlformats.org/drawingml/2006/main" xmlns:r="http://schemas.openxmlformats.org/officeDocument/2006/relationships" xmlns:p="http://schemas.openxmlformats.org/presentationml/2006/main">
   <p:cSld>
     <p:spTree>
@@ -9861,7 +9510,7 @@
                 <a:ea typeface="Segoe UI Emoji" panose="020B0502040204020203" pitchFamily="34" charset="0"/>
               </a:rPr>
               <a:pPr/>
-              <a:t>24</a:t>
+              <a:t>23</a:t>
             </a:fld>
             <a:endParaRPr lang="en-US" b="1" dirty="0">
               <a:latin typeface="Segoe UI Emoji" panose="020B0502040204020203" pitchFamily="34" charset="0"/>
@@ -10555,6 +10204,810 @@
     <p:extLst>
       <p:ext uri="{BB962C8B-B14F-4D97-AF65-F5344CB8AC3E}">
         <p14:creationId xmlns:p14="http://schemas.microsoft.com/office/powerpoint/2010/main" val="1978115629"/>
+      </p:ext>
+    </p:extLst>
+  </p:cSld>
+  <p:clrMapOvr>
+    <a:masterClrMapping/>
+  </p:clrMapOvr>
+</p:sld>
+</file>
+
+<file path=ppt/slides/slide24.xml><?xml version="1.0" encoding="utf-8"?>
+<p:sld xmlns:a="http://schemas.openxmlformats.org/drawingml/2006/main" xmlns:r="http://schemas.openxmlformats.org/officeDocument/2006/relationships" xmlns:p="http://schemas.openxmlformats.org/presentationml/2006/main">
+  <p:cSld>
+    <p:spTree>
+      <p:nvGrpSpPr>
+        <p:cNvPr id="1" name="">
+          <a:extLst>
+            <a:ext uri="{FF2B5EF4-FFF2-40B4-BE49-F238E27FC236}">
+              <a16:creationId xmlns:a16="http://schemas.microsoft.com/office/drawing/2014/main" id="{CA5A1820-D8BB-F7ED-6AE6-43BD331E16BC}"/>
+            </a:ext>
+          </a:extLst>
+        </p:cNvPr>
+        <p:cNvGrpSpPr/>
+        <p:nvPr/>
+      </p:nvGrpSpPr>
+      <p:grpSpPr>
+        <a:xfrm>
+          <a:off x="0" y="0"/>
+          <a:ext cx="0" cy="0"/>
+          <a:chOff x="0" y="0"/>
+          <a:chExt cx="0" cy="0"/>
+        </a:xfrm>
+      </p:grpSpPr>
+      <p:sp>
+        <p:nvSpPr>
+          <p:cNvPr id="3" name="제목 1">
+            <a:extLst>
+              <a:ext uri="{FF2B5EF4-FFF2-40B4-BE49-F238E27FC236}">
+                <a16:creationId xmlns:a16="http://schemas.microsoft.com/office/drawing/2014/main" id="{A3B981F2-2467-D7E0-08BE-479E2199F0A2}"/>
+              </a:ext>
+            </a:extLst>
+          </p:cNvPr>
+          <p:cNvSpPr txBox="1">
+            <a:spLocks/>
+          </p:cNvSpPr>
+          <p:nvPr/>
+        </p:nvSpPr>
+        <p:spPr>
+          <a:xfrm>
+            <a:off x="475645" y="481983"/>
+            <a:ext cx="10353762" cy="766439"/>
+          </a:xfrm>
+          <a:prstGeom prst="rect">
+            <a:avLst/>
+          </a:prstGeom>
+        </p:spPr>
+        <p:txBody>
+          <a:bodyPr vert="horz" lIns="91440" tIns="45720" rIns="91440" bIns="45720" rtlCol="0" anchor="ctr">
+            <a:normAutofit/>
+          </a:bodyPr>
+          <a:lstStyle>
+            <a:lvl1pPr algn="ctr" defTabSz="914400" rtl="0" eaLnBrk="1" latinLnBrk="1" hangingPunct="1">
+              <a:lnSpc>
+                <a:spcPct val="90000"/>
+              </a:lnSpc>
+              <a:spcBef>
+                <a:spcPct val="0"/>
+              </a:spcBef>
+              <a:buNone/>
+              <a:defRPr sz="3200" kern="1200" cap="all" baseline="0">
+                <a:solidFill>
+                  <a:schemeClr val="tx1"/>
+                </a:solidFill>
+                <a:effectLst/>
+                <a:latin typeface="Batang" panose="02030600000101010101" pitchFamily="18" charset="-127"/>
+                <a:ea typeface="Batang" panose="02030600000101010101" pitchFamily="18" charset="-127"/>
+                <a:cs typeface="+mj-cs"/>
+              </a:defRPr>
+            </a:lvl1pPr>
+          </a:lstStyle>
+          <a:p>
+            <a:pPr algn="l"/>
+            <a:r>
+              <a:rPr lang="en-US" altLang="ko-KR" sz="2800" cap="none" dirty="0">
+                <a:solidFill>
+                  <a:schemeClr val="bg2">
+                    <a:lumMod val="25000"/>
+                  </a:schemeClr>
+                </a:solidFill>
+                <a:latin typeface="D2Coding" panose="020B0609020101020101" pitchFamily="49" charset="-127"/>
+                <a:ea typeface="D2Coding" panose="020B0609020101020101" pitchFamily="49" charset="-127"/>
+                <a:cs typeface="Segoe UI Light" panose="020B0502040204020203" pitchFamily="34" charset="0"/>
+              </a:rPr>
+              <a:t>Representation Learning</a:t>
+            </a:r>
+          </a:p>
+        </p:txBody>
+      </p:sp>
+      <p:sp>
+        <p:nvSpPr>
+          <p:cNvPr id="51" name="슬라이드 번호 개체 틀 3">
+            <a:extLst>
+              <a:ext uri="{FF2B5EF4-FFF2-40B4-BE49-F238E27FC236}">
+                <a16:creationId xmlns:a16="http://schemas.microsoft.com/office/drawing/2014/main" id="{37A653FF-5206-19AB-DD44-B9C8FF9BAE44}"/>
+              </a:ext>
+            </a:extLst>
+          </p:cNvPr>
+          <p:cNvSpPr txBox="1">
+            <a:spLocks/>
+          </p:cNvSpPr>
+          <p:nvPr/>
+        </p:nvSpPr>
+        <p:spPr>
+          <a:xfrm>
+            <a:off x="11180761" y="299420"/>
+            <a:ext cx="753545" cy="365125"/>
+          </a:xfrm>
+          <a:prstGeom prst="rect">
+            <a:avLst/>
+          </a:prstGeom>
+        </p:spPr>
+        <p:txBody>
+          <a:bodyPr vert="horz" lIns="91440" tIns="45720" rIns="91440" bIns="45720" rtlCol="0" anchor="ctr"/>
+          <a:lstStyle>
+            <a:defPPr rtl="0">
+              <a:defRPr lang="ko-KR"/>
+            </a:defPPr>
+            <a:lvl1pPr marL="0" algn="r" defTabSz="914400" rtl="0" eaLnBrk="1" latinLnBrk="0" hangingPunct="1">
+              <a:defRPr sz="1200" kern="1200" baseline="0">
+                <a:solidFill>
+                  <a:schemeClr val="tx1">
+                    <a:lumMod val="65000"/>
+                    <a:lumOff val="35000"/>
+                  </a:schemeClr>
+                </a:solidFill>
+                <a:latin typeface="맑은 고딕" panose="020B0503020000020004" pitchFamily="50" charset="-127"/>
+                <a:ea typeface="맑은 고딕" panose="020B0503020000020004" pitchFamily="50" charset="-127"/>
+                <a:cs typeface="+mn-cs"/>
+              </a:defRPr>
+            </a:lvl1pPr>
+            <a:lvl2pPr marL="457200" algn="l" defTabSz="914400" rtl="0" eaLnBrk="1" latinLnBrk="0" hangingPunct="1">
+              <a:defRPr sz="1800" kern="1200">
+                <a:solidFill>
+                  <a:schemeClr val="tx1"/>
+                </a:solidFill>
+                <a:latin typeface="+mn-lt"/>
+                <a:ea typeface="+mn-ea"/>
+                <a:cs typeface="+mn-cs"/>
+              </a:defRPr>
+            </a:lvl2pPr>
+            <a:lvl3pPr marL="914400" algn="l" defTabSz="914400" rtl="0" eaLnBrk="1" latinLnBrk="0" hangingPunct="1">
+              <a:defRPr sz="1800" kern="1200">
+                <a:solidFill>
+                  <a:schemeClr val="tx1"/>
+                </a:solidFill>
+                <a:latin typeface="+mn-lt"/>
+                <a:ea typeface="+mn-ea"/>
+                <a:cs typeface="+mn-cs"/>
+              </a:defRPr>
+            </a:lvl3pPr>
+            <a:lvl4pPr marL="1371600" algn="l" defTabSz="914400" rtl="0" eaLnBrk="1" latinLnBrk="0" hangingPunct="1">
+              <a:defRPr sz="1800" kern="1200">
+                <a:solidFill>
+                  <a:schemeClr val="tx1"/>
+                </a:solidFill>
+                <a:latin typeface="+mn-lt"/>
+                <a:ea typeface="+mn-ea"/>
+                <a:cs typeface="+mn-cs"/>
+              </a:defRPr>
+            </a:lvl4pPr>
+            <a:lvl5pPr marL="1828800" algn="l" defTabSz="914400" rtl="0" eaLnBrk="1" latinLnBrk="0" hangingPunct="1">
+              <a:defRPr sz="1800" kern="1200">
+                <a:solidFill>
+                  <a:schemeClr val="tx1"/>
+                </a:solidFill>
+                <a:latin typeface="+mn-lt"/>
+                <a:ea typeface="+mn-ea"/>
+                <a:cs typeface="+mn-cs"/>
+              </a:defRPr>
+            </a:lvl5pPr>
+            <a:lvl6pPr marL="2286000" algn="l" defTabSz="914400" rtl="0" eaLnBrk="1" latinLnBrk="0" hangingPunct="1">
+              <a:defRPr sz="1800" kern="1200">
+                <a:solidFill>
+                  <a:schemeClr val="tx1"/>
+                </a:solidFill>
+                <a:latin typeface="+mn-lt"/>
+                <a:ea typeface="+mn-ea"/>
+                <a:cs typeface="+mn-cs"/>
+              </a:defRPr>
+            </a:lvl6pPr>
+            <a:lvl7pPr marL="2743200" algn="l" defTabSz="914400" rtl="0" eaLnBrk="1" latinLnBrk="0" hangingPunct="1">
+              <a:defRPr sz="1800" kern="1200">
+                <a:solidFill>
+                  <a:schemeClr val="tx1"/>
+                </a:solidFill>
+                <a:latin typeface="+mn-lt"/>
+                <a:ea typeface="+mn-ea"/>
+                <a:cs typeface="+mn-cs"/>
+              </a:defRPr>
+            </a:lvl7pPr>
+            <a:lvl8pPr marL="3200400" algn="l" defTabSz="914400" rtl="0" eaLnBrk="1" latinLnBrk="0" hangingPunct="1">
+              <a:defRPr sz="1800" kern="1200">
+                <a:solidFill>
+                  <a:schemeClr val="tx1"/>
+                </a:solidFill>
+                <a:latin typeface="+mn-lt"/>
+                <a:ea typeface="+mn-ea"/>
+                <a:cs typeface="+mn-cs"/>
+              </a:defRPr>
+            </a:lvl8pPr>
+            <a:lvl9pPr marL="3657600" algn="l" defTabSz="914400" rtl="0" eaLnBrk="1" latinLnBrk="0" hangingPunct="1">
+              <a:defRPr sz="1800" kern="1200">
+                <a:solidFill>
+                  <a:schemeClr val="tx1"/>
+                </a:solidFill>
+                <a:latin typeface="+mn-lt"/>
+                <a:ea typeface="+mn-ea"/>
+                <a:cs typeface="+mn-cs"/>
+              </a:defRPr>
+            </a:lvl9pPr>
+          </a:lstStyle>
+          <a:p>
+            <a:fld id="{D57F1E4F-1CFF-5643-939E-217C01CDF565}" type="slidenum">
+              <a:rPr lang="en-US" b="1" smtClean="0">
+                <a:latin typeface="Segoe UI Emoji" panose="020B0502040204020203" pitchFamily="34" charset="0"/>
+                <a:ea typeface="Segoe UI Emoji" panose="020B0502040204020203" pitchFamily="34" charset="0"/>
+              </a:rPr>
+              <a:pPr/>
+              <a:t>24</a:t>
+            </a:fld>
+            <a:endParaRPr lang="en-US" b="1" dirty="0">
+              <a:latin typeface="Segoe UI Emoji" panose="020B0502040204020203" pitchFamily="34" charset="0"/>
+              <a:ea typeface="Segoe UI Emoji" panose="020B0502040204020203" pitchFamily="34" charset="0"/>
+            </a:endParaRPr>
+          </a:p>
+        </p:txBody>
+      </p:sp>
+      <p:sp>
+        <p:nvSpPr>
+          <p:cNvPr id="11" name="TextBox 10">
+            <a:extLst>
+              <a:ext uri="{FF2B5EF4-FFF2-40B4-BE49-F238E27FC236}">
+                <a16:creationId xmlns:a16="http://schemas.microsoft.com/office/drawing/2014/main" id="{8A556384-3DDF-1FFF-9B9A-4AEF48BEB05E}"/>
+              </a:ext>
+            </a:extLst>
+          </p:cNvPr>
+          <p:cNvSpPr txBox="1"/>
+          <p:nvPr/>
+        </p:nvSpPr>
+        <p:spPr>
+          <a:xfrm>
+            <a:off x="552449" y="1202027"/>
+            <a:ext cx="11153776" cy="1531830"/>
+          </a:xfrm>
+          <a:prstGeom prst="rect">
+            <a:avLst/>
+          </a:prstGeom>
+          <a:noFill/>
+        </p:spPr>
+        <p:txBody>
+          <a:bodyPr wrap="square">
+            <a:spAutoFit/>
+          </a:bodyPr>
+          <a:lstStyle/>
+          <a:p>
+            <a:pPr marL="285750" indent="-285750">
+              <a:lnSpc>
+                <a:spcPct val="150000"/>
+              </a:lnSpc>
+              <a:buFont typeface="Wingdings" panose="05000000000000000000" pitchFamily="2" charset="2"/>
+              <a:buChar char="v"/>
+            </a:pPr>
+            <a:r>
+              <a:rPr lang="en-US" altLang="ko-KR" sz="1600" dirty="0">
+                <a:latin typeface="D2Coding" panose="020B0609020101020101" pitchFamily="49" charset="-127"/>
+                <a:ea typeface="D2Coding" panose="020B0609020101020101" pitchFamily="49" charset="-127"/>
+              </a:rPr>
+              <a:t>Representation Learning</a:t>
+            </a:r>
+            <a:r>
+              <a:rPr lang="ko-KR" altLang="en-US" sz="1600" dirty="0">
+                <a:latin typeface="D2Coding" panose="020B0609020101020101" pitchFamily="49" charset="-127"/>
+                <a:ea typeface="D2Coding" panose="020B0609020101020101" pitchFamily="49" charset="-127"/>
+              </a:rPr>
+              <a:t>의</a:t>
+            </a:r>
+            <a:r>
+              <a:rPr lang="en-US" altLang="ko-KR" sz="1600" dirty="0">
+                <a:latin typeface="D2Coding" panose="020B0609020101020101" pitchFamily="49" charset="-127"/>
+                <a:ea typeface="D2Coding" panose="020B0609020101020101" pitchFamily="49" charset="-127"/>
+              </a:rPr>
+              <a:t> </a:t>
+            </a:r>
+            <a:r>
+              <a:rPr lang="ko-KR" altLang="en-US" sz="1600" dirty="0" err="1">
+                <a:latin typeface="D2Coding" panose="020B0609020101020101" pitchFamily="49" charset="-127"/>
+                <a:ea typeface="D2Coding" panose="020B0609020101020101" pitchFamily="49" charset="-127"/>
+              </a:rPr>
+              <a:t>핵심음</a:t>
+            </a:r>
+            <a:r>
+              <a:rPr lang="en-US" altLang="ko-KR" sz="1600" dirty="0">
+                <a:latin typeface="D2Coding" panose="020B0609020101020101" pitchFamily="49" charset="-127"/>
+                <a:ea typeface="D2Coding" panose="020B0609020101020101" pitchFamily="49" charset="-127"/>
+              </a:rPr>
+              <a:t> </a:t>
+            </a:r>
+            <a:r>
+              <a:rPr lang="ko-KR" altLang="en-US" sz="1600" dirty="0">
+                <a:latin typeface="D2Coding" panose="020B0609020101020101" pitchFamily="49" charset="-127"/>
+                <a:ea typeface="D2Coding" panose="020B0609020101020101" pitchFamily="49" charset="-127"/>
+              </a:rPr>
+              <a:t>사람의 얼굴을 픽셀 하나하나로 기억하지 않고</a:t>
+            </a:r>
+            <a:r>
+              <a:rPr lang="en-US" altLang="ko-KR" sz="1600" dirty="0">
+                <a:latin typeface="D2Coding" panose="020B0609020101020101" pitchFamily="49" charset="-127"/>
+                <a:ea typeface="D2Coding" panose="020B0609020101020101" pitchFamily="49" charset="-127"/>
+              </a:rPr>
+              <a:t>, </a:t>
+            </a:r>
+            <a:r>
+              <a:rPr lang="ko-KR" altLang="en-US" sz="1600" dirty="0">
+                <a:latin typeface="D2Coding" panose="020B0609020101020101" pitchFamily="49" charset="-127"/>
+                <a:ea typeface="D2Coding" panose="020B0609020101020101" pitchFamily="49" charset="-127"/>
+              </a:rPr>
+              <a:t>의미 있는 특징</a:t>
+            </a:r>
+            <a:r>
+              <a:rPr lang="en-US" altLang="ko-KR" sz="1600" dirty="0">
+                <a:latin typeface="D2Coding" panose="020B0609020101020101" pitchFamily="49" charset="-127"/>
+                <a:ea typeface="D2Coding" panose="020B0609020101020101" pitchFamily="49" charset="-127"/>
+              </a:rPr>
+              <a:t>(feature)</a:t>
+            </a:r>
+            <a:r>
+              <a:rPr lang="ko-KR" altLang="en-US" sz="1600" dirty="0">
+                <a:latin typeface="D2Coding" panose="020B0609020101020101" pitchFamily="49" charset="-127"/>
+                <a:ea typeface="D2Coding" panose="020B0609020101020101" pitchFamily="49" charset="-127"/>
+              </a:rPr>
+              <a:t>을 압축해서 표현</a:t>
+            </a:r>
+            <a:endParaRPr lang="en-US" altLang="ko-KR" sz="1600" dirty="0">
+              <a:latin typeface="D2Coding" panose="020B0609020101020101" pitchFamily="49" charset="-127"/>
+              <a:ea typeface="D2Coding" panose="020B0609020101020101" pitchFamily="49" charset="-127"/>
+            </a:endParaRPr>
+          </a:p>
+          <a:p>
+            <a:pPr marL="285750" indent="-285750">
+              <a:lnSpc>
+                <a:spcPct val="150000"/>
+              </a:lnSpc>
+              <a:buFont typeface="Wingdings" panose="05000000000000000000" pitchFamily="2" charset="2"/>
+              <a:buChar char="v"/>
+            </a:pPr>
+            <a:r>
+              <a:rPr lang="en-US" altLang="ko-KR" sz="1600" dirty="0">
+                <a:latin typeface="D2Coding" panose="020B0609020101020101" pitchFamily="49" charset="-127"/>
+                <a:ea typeface="D2Coding" panose="020B0609020101020101" pitchFamily="49" charset="-127"/>
+              </a:rPr>
+              <a:t>Representation Learning</a:t>
+            </a:r>
+            <a:r>
+              <a:rPr lang="ko-KR" altLang="en-US" sz="1600" dirty="0">
+                <a:latin typeface="D2Coding" panose="020B0609020101020101" pitchFamily="49" charset="-127"/>
+                <a:ea typeface="D2Coding" panose="020B0609020101020101" pitchFamily="49" charset="-127"/>
+              </a:rPr>
+              <a:t>은 복잡한 원본 데이터를 그대로 다루는 대신</a:t>
+            </a:r>
+            <a:r>
+              <a:rPr lang="en-US" altLang="ko-KR" sz="1600" dirty="0">
+                <a:latin typeface="D2Coding" panose="020B0609020101020101" pitchFamily="49" charset="-127"/>
+                <a:ea typeface="D2Coding" panose="020B0609020101020101" pitchFamily="49" charset="-127"/>
+              </a:rPr>
+              <a:t>, </a:t>
+            </a:r>
+            <a:r>
+              <a:rPr lang="ko-KR" altLang="en-US" sz="1600" dirty="0">
+                <a:latin typeface="D2Coding" panose="020B0609020101020101" pitchFamily="49" charset="-127"/>
+                <a:ea typeface="D2Coding" panose="020B0609020101020101" pitchFamily="49" charset="-127"/>
+              </a:rPr>
+              <a:t>데이터의 중요한 특징을 스스로 찾아서 훨씬 적은 수의 의미 있는 변수로 표현</a:t>
+            </a:r>
+          </a:p>
+        </p:txBody>
+      </p:sp>
+      <p:sp>
+        <p:nvSpPr>
+          <p:cNvPr id="6" name="TextBox 5">
+            <a:extLst>
+              <a:ext uri="{FF2B5EF4-FFF2-40B4-BE49-F238E27FC236}">
+                <a16:creationId xmlns:a16="http://schemas.microsoft.com/office/drawing/2014/main" id="{2FB39968-8BFE-6D51-4666-350B192EBCCF}"/>
+              </a:ext>
+            </a:extLst>
+          </p:cNvPr>
+          <p:cNvSpPr txBox="1"/>
+          <p:nvPr/>
+        </p:nvSpPr>
+        <p:spPr>
+          <a:xfrm>
+            <a:off x="2228848" y="3281660"/>
+            <a:ext cx="9039227" cy="338554"/>
+          </a:xfrm>
+          <a:prstGeom prst="rect">
+            <a:avLst/>
+          </a:prstGeom>
+          <a:solidFill>
+            <a:schemeClr val="tx1"/>
+          </a:solidFill>
+        </p:spPr>
+        <p:txBody>
+          <a:bodyPr wrap="square">
+            <a:spAutoFit/>
+          </a:bodyPr>
+          <a:lstStyle/>
+          <a:p>
+            <a:pPr>
+              <a:buNone/>
+            </a:pPr>
+            <a:r>
+              <a:rPr lang="ko-KR" altLang="en-US" sz="1600" dirty="0">
+                <a:solidFill>
+                  <a:schemeClr val="bg1"/>
+                </a:solidFill>
+                <a:latin typeface="D2Coding" panose="020B0609020101020101" pitchFamily="49" charset="-127"/>
+                <a:ea typeface="D2Coding" panose="020B0609020101020101" pitchFamily="49" charset="-127"/>
+              </a:rPr>
+              <a:t>사진 한 장이 </a:t>
+            </a:r>
+            <a:r>
+              <a:rPr lang="en-US" altLang="ko-KR" sz="1600" dirty="0">
+                <a:solidFill>
+                  <a:schemeClr val="bg1"/>
+                </a:solidFill>
+                <a:latin typeface="D2Coding" panose="020B0609020101020101" pitchFamily="49" charset="-127"/>
+                <a:ea typeface="D2Coding" panose="020B0609020101020101" pitchFamily="49" charset="-127"/>
+              </a:rPr>
+              <a:t>256 × 256 × 3 = 196,608</a:t>
+            </a:r>
+            <a:r>
+              <a:rPr lang="ko-KR" altLang="en-US" sz="1600" dirty="0">
+                <a:solidFill>
+                  <a:schemeClr val="bg1"/>
+                </a:solidFill>
+                <a:latin typeface="D2Coding" panose="020B0609020101020101" pitchFamily="49" charset="-127"/>
+                <a:ea typeface="D2Coding" panose="020B0609020101020101" pitchFamily="49" charset="-127"/>
+              </a:rPr>
+              <a:t>개의 </a:t>
+            </a:r>
+            <a:r>
+              <a:rPr lang="ko-KR" altLang="en-US" sz="1600" dirty="0" err="1">
+                <a:solidFill>
+                  <a:schemeClr val="bg1"/>
+                </a:solidFill>
+                <a:latin typeface="D2Coding" panose="020B0609020101020101" pitchFamily="49" charset="-127"/>
+                <a:ea typeface="D2Coding" panose="020B0609020101020101" pitchFamily="49" charset="-127"/>
+              </a:rPr>
+              <a:t>픽셀값</a:t>
+            </a:r>
+            <a:r>
+              <a:rPr lang="ko-KR" altLang="en-US" sz="1600" dirty="0">
+                <a:solidFill>
+                  <a:schemeClr val="bg1"/>
+                </a:solidFill>
+                <a:latin typeface="D2Coding" panose="020B0609020101020101" pitchFamily="49" charset="-127"/>
+                <a:ea typeface="D2Coding" panose="020B0609020101020101" pitchFamily="49" charset="-127"/>
+              </a:rPr>
+              <a:t> 으로 구성</a:t>
+            </a:r>
+          </a:p>
+        </p:txBody>
+      </p:sp>
+      <p:sp>
+        <p:nvSpPr>
+          <p:cNvPr id="10" name="TextBox 9">
+            <a:extLst>
+              <a:ext uri="{FF2B5EF4-FFF2-40B4-BE49-F238E27FC236}">
+                <a16:creationId xmlns:a16="http://schemas.microsoft.com/office/drawing/2014/main" id="{48BE4226-0E02-4D2E-7F49-D548E3B897E5}"/>
+              </a:ext>
+            </a:extLst>
+          </p:cNvPr>
+          <p:cNvSpPr txBox="1"/>
+          <p:nvPr/>
+        </p:nvSpPr>
+        <p:spPr>
+          <a:xfrm>
+            <a:off x="2228849" y="4142085"/>
+            <a:ext cx="9039226" cy="338554"/>
+          </a:xfrm>
+          <a:prstGeom prst="rect">
+            <a:avLst/>
+          </a:prstGeom>
+          <a:solidFill>
+            <a:schemeClr val="tx1"/>
+          </a:solidFill>
+        </p:spPr>
+        <p:txBody>
+          <a:bodyPr wrap="square">
+            <a:spAutoFit/>
+          </a:bodyPr>
+          <a:lstStyle/>
+          <a:p>
+            <a:r>
+              <a:rPr lang="ko-KR" altLang="en-US" sz="1600" dirty="0">
+                <a:solidFill>
+                  <a:schemeClr val="bg1"/>
+                </a:solidFill>
+                <a:latin typeface="D2Coding" panose="020B0609020101020101" pitchFamily="49" charset="-127"/>
+                <a:ea typeface="D2Coding" panose="020B0609020101020101" pitchFamily="49" charset="-127"/>
+              </a:rPr>
+              <a:t>사람은 </a:t>
+            </a:r>
+            <a:r>
+              <a:rPr lang="en-US" altLang="ko-KR" sz="1600" dirty="0">
+                <a:solidFill>
+                  <a:schemeClr val="bg1"/>
+                </a:solidFill>
+                <a:latin typeface="D2Coding" panose="020B0609020101020101" pitchFamily="49" charset="-127"/>
+                <a:ea typeface="D2Coding" panose="020B0609020101020101" pitchFamily="49" charset="-127"/>
+              </a:rPr>
+              <a:t>"</a:t>
+            </a:r>
+            <a:r>
+              <a:rPr lang="ko-KR" altLang="en-US" sz="1600" dirty="0">
+                <a:solidFill>
+                  <a:schemeClr val="bg1"/>
+                </a:solidFill>
+                <a:latin typeface="D2Coding" panose="020B0609020101020101" pitchFamily="49" charset="-127"/>
+                <a:ea typeface="D2Coding" panose="020B0609020101020101" pitchFamily="49" charset="-127"/>
+              </a:rPr>
+              <a:t>왼쪽 위에서 </a:t>
+            </a:r>
+            <a:r>
+              <a:rPr lang="en-US" altLang="ko-KR" sz="1600" dirty="0">
+                <a:solidFill>
+                  <a:schemeClr val="bg1"/>
+                </a:solidFill>
+                <a:latin typeface="D2Coding" panose="020B0609020101020101" pitchFamily="49" charset="-127"/>
+                <a:ea typeface="D2Coding" panose="020B0609020101020101" pitchFamily="49" charset="-127"/>
+              </a:rPr>
+              <a:t>37</a:t>
+            </a:r>
+            <a:r>
+              <a:rPr lang="ko-KR" altLang="en-US" sz="1600" dirty="0">
+                <a:solidFill>
+                  <a:schemeClr val="bg1"/>
+                </a:solidFill>
+                <a:latin typeface="D2Coding" panose="020B0609020101020101" pitchFamily="49" charset="-127"/>
+                <a:ea typeface="D2Coding" panose="020B0609020101020101" pitchFamily="49" charset="-127"/>
+              </a:rPr>
+              <a:t>번째 픽셀의 색깔이 무엇이고</a:t>
+            </a:r>
+            <a:r>
+              <a:rPr lang="en-US" altLang="ko-KR" sz="1600" dirty="0">
+                <a:solidFill>
+                  <a:schemeClr val="bg1"/>
+                </a:solidFill>
+                <a:latin typeface="D2Coding" panose="020B0609020101020101" pitchFamily="49" charset="-127"/>
+                <a:ea typeface="D2Coding" panose="020B0609020101020101" pitchFamily="49" charset="-127"/>
+              </a:rPr>
+              <a:t>...“ </a:t>
+            </a:r>
+            <a:r>
+              <a:rPr lang="ko-KR" altLang="en-US" sz="1600" dirty="0">
+                <a:solidFill>
+                  <a:schemeClr val="bg1"/>
+                </a:solidFill>
+                <a:latin typeface="D2Coding" panose="020B0609020101020101" pitchFamily="49" charset="-127"/>
+                <a:ea typeface="D2Coding" panose="020B0609020101020101" pitchFamily="49" charset="-127"/>
+              </a:rPr>
+              <a:t>이렇게 생각하지 않음</a:t>
+            </a:r>
+            <a:endParaRPr lang="en-US" altLang="ko-KR" sz="1600" dirty="0">
+              <a:solidFill>
+                <a:schemeClr val="bg1"/>
+              </a:solidFill>
+              <a:latin typeface="D2Coding" panose="020B0609020101020101" pitchFamily="49" charset="-127"/>
+              <a:ea typeface="D2Coding" panose="020B0609020101020101" pitchFamily="49" charset="-127"/>
+            </a:endParaRPr>
+          </a:p>
+        </p:txBody>
+      </p:sp>
+      <p:sp>
+        <p:nvSpPr>
+          <p:cNvPr id="13" name="TextBox 12">
+            <a:extLst>
+              <a:ext uri="{FF2B5EF4-FFF2-40B4-BE49-F238E27FC236}">
+                <a16:creationId xmlns:a16="http://schemas.microsoft.com/office/drawing/2014/main" id="{C982C9C0-2D0B-9E1A-6664-BE096FCD1ECD}"/>
+              </a:ext>
+            </a:extLst>
+          </p:cNvPr>
+          <p:cNvSpPr txBox="1"/>
+          <p:nvPr/>
+        </p:nvSpPr>
+        <p:spPr>
+          <a:xfrm>
+            <a:off x="2228848" y="5002510"/>
+            <a:ext cx="9039226" cy="338554"/>
+          </a:xfrm>
+          <a:prstGeom prst="rect">
+            <a:avLst/>
+          </a:prstGeom>
+          <a:solidFill>
+            <a:schemeClr val="tx1"/>
+          </a:solidFill>
+        </p:spPr>
+        <p:txBody>
+          <a:bodyPr wrap="square">
+            <a:spAutoFit/>
+          </a:bodyPr>
+          <a:lstStyle/>
+          <a:p>
+            <a:r>
+              <a:rPr lang="ko-KR" altLang="en-US" sz="1600" dirty="0">
+                <a:solidFill>
+                  <a:schemeClr val="bg1"/>
+                </a:solidFill>
+                <a:latin typeface="D2Coding" panose="020B0609020101020101" pitchFamily="49" charset="-127"/>
+                <a:ea typeface="D2Coding" panose="020B0609020101020101" pitchFamily="49" charset="-127"/>
+              </a:rPr>
+              <a:t>추상적으로 생각 </a:t>
+            </a:r>
+            <a:r>
+              <a:rPr lang="en-US" altLang="ko-KR" sz="1600" dirty="0">
+                <a:solidFill>
+                  <a:schemeClr val="bg1"/>
+                </a:solidFill>
+                <a:latin typeface="D2Coding" panose="020B0609020101020101" pitchFamily="49" charset="-127"/>
+                <a:ea typeface="D2Coding" panose="020B0609020101020101" pitchFamily="49" charset="-127"/>
+                <a:sym typeface="Wingdings" panose="05000000000000000000" pitchFamily="2" charset="2"/>
+              </a:rPr>
+              <a:t> </a:t>
+            </a:r>
+            <a:r>
+              <a:rPr lang="ko-KR" altLang="en-US" sz="1600" dirty="0">
+                <a:solidFill>
+                  <a:schemeClr val="bg1"/>
+                </a:solidFill>
+                <a:latin typeface="D2Coding" panose="020B0609020101020101" pitchFamily="49" charset="-127"/>
+                <a:ea typeface="D2Coding" panose="020B0609020101020101" pitchFamily="49" charset="-127"/>
+              </a:rPr>
+              <a:t>금발 안경 둥근 얼굴 큰 눈 긴 코 웃는 표정 긴 머리 </a:t>
+            </a:r>
+            <a:r>
+              <a:rPr lang="en-US" altLang="ko-KR" sz="1600" dirty="0">
+                <a:solidFill>
+                  <a:schemeClr val="bg1"/>
+                </a:solidFill>
+                <a:latin typeface="D2Coding" panose="020B0609020101020101" pitchFamily="49" charset="-127"/>
+                <a:ea typeface="D2Coding" panose="020B0609020101020101" pitchFamily="49" charset="-127"/>
+              </a:rPr>
+              <a:t>...</a:t>
+            </a:r>
+            <a:endParaRPr lang="ko-KR" altLang="en-US" sz="1600" dirty="0">
+              <a:solidFill>
+                <a:schemeClr val="bg1"/>
+              </a:solidFill>
+              <a:latin typeface="D2Coding" panose="020B0609020101020101" pitchFamily="49" charset="-127"/>
+              <a:ea typeface="D2Coding" panose="020B0609020101020101" pitchFamily="49" charset="-127"/>
+            </a:endParaRPr>
+          </a:p>
+        </p:txBody>
+      </p:sp>
+      <p:sp>
+        <p:nvSpPr>
+          <p:cNvPr id="15" name="TextBox 14">
+            <a:extLst>
+              <a:ext uri="{FF2B5EF4-FFF2-40B4-BE49-F238E27FC236}">
+                <a16:creationId xmlns:a16="http://schemas.microsoft.com/office/drawing/2014/main" id="{CF4850DD-2C90-53A3-0851-79DE496DE803}"/>
+              </a:ext>
+            </a:extLst>
+          </p:cNvPr>
+          <p:cNvSpPr txBox="1"/>
+          <p:nvPr/>
+        </p:nvSpPr>
+        <p:spPr>
+          <a:xfrm>
+            <a:off x="2228849" y="5862935"/>
+            <a:ext cx="9039225" cy="338554"/>
+          </a:xfrm>
+          <a:prstGeom prst="rect">
+            <a:avLst/>
+          </a:prstGeom>
+          <a:solidFill>
+            <a:schemeClr val="tx1"/>
+          </a:solidFill>
+        </p:spPr>
+        <p:txBody>
+          <a:bodyPr wrap="square">
+            <a:spAutoFit/>
+          </a:bodyPr>
+          <a:lstStyle/>
+          <a:p>
+            <a:pPr>
+              <a:buNone/>
+            </a:pPr>
+            <a:r>
+              <a:rPr lang="en-US" altLang="ko-KR" sz="1600" dirty="0">
+                <a:solidFill>
+                  <a:schemeClr val="bg1"/>
+                </a:solidFill>
+                <a:latin typeface="D2Coding" panose="020B0609020101020101" pitchFamily="49" charset="-127"/>
+                <a:ea typeface="D2Coding" panose="020B0609020101020101" pitchFamily="49" charset="-127"/>
+              </a:rPr>
+              <a:t>196,608</a:t>
+            </a:r>
+            <a:r>
+              <a:rPr lang="ko-KR" altLang="en-US" sz="1600" dirty="0">
+                <a:solidFill>
+                  <a:schemeClr val="bg1"/>
+                </a:solidFill>
+                <a:latin typeface="D2Coding" panose="020B0609020101020101" pitchFamily="49" charset="-127"/>
+                <a:ea typeface="D2Coding" panose="020B0609020101020101" pitchFamily="49" charset="-127"/>
+              </a:rPr>
+              <a:t>개의 픽셀 → 몇 개의 의미 있는 특징으로 바꾸어 생각하는데 이것이 </a:t>
+            </a:r>
+            <a:r>
+              <a:rPr lang="en-US" altLang="ko-KR" sz="1600" dirty="0">
+                <a:solidFill>
+                  <a:schemeClr val="bg1"/>
+                </a:solidFill>
+                <a:latin typeface="D2Coding" panose="020B0609020101020101" pitchFamily="49" charset="-127"/>
+                <a:ea typeface="D2Coding" panose="020B0609020101020101" pitchFamily="49" charset="-127"/>
+              </a:rPr>
+              <a:t>Representation</a:t>
+            </a:r>
+          </a:p>
+        </p:txBody>
+      </p:sp>
+      <p:pic>
+        <p:nvPicPr>
+          <p:cNvPr id="19" name="그래픽 18" descr="반시계 방향으로 굽은 화살표">
+            <a:extLst>
+              <a:ext uri="{FF2B5EF4-FFF2-40B4-BE49-F238E27FC236}">
+                <a16:creationId xmlns:a16="http://schemas.microsoft.com/office/drawing/2014/main" id="{B3B9281F-6990-E29E-8E22-65F51865AA9A}"/>
+              </a:ext>
+            </a:extLst>
+          </p:cNvPr>
+          <p:cNvPicPr>
+            <a:picLocks noChangeAspect="1"/>
+          </p:cNvPicPr>
+          <p:nvPr/>
+        </p:nvPicPr>
+        <p:blipFill>
+          <a:blip r:embed="rId2">
+            <a:extLst>
+              <a:ext uri="{96DAC541-7B7A-43D3-8B79-37D633B846F1}">
+                <asvg:svgBlip xmlns:asvg="http://schemas.microsoft.com/office/drawing/2016/SVG/main" r:embed="rId3"/>
+              </a:ext>
+            </a:extLst>
+          </a:blip>
+          <a:stretch>
+            <a:fillRect/>
+          </a:stretch>
+        </p:blipFill>
+        <p:spPr>
+          <a:xfrm rot="12122174">
+            <a:off x="1345440" y="3585568"/>
+            <a:ext cx="891188" cy="891188"/>
+          </a:xfrm>
+          <a:prstGeom prst="rect">
+            <a:avLst/>
+          </a:prstGeom>
+        </p:spPr>
+      </p:pic>
+      <p:pic>
+        <p:nvPicPr>
+          <p:cNvPr id="20" name="그래픽 19" descr="반시계 방향으로 굽은 화살표">
+            <a:extLst>
+              <a:ext uri="{FF2B5EF4-FFF2-40B4-BE49-F238E27FC236}">
+                <a16:creationId xmlns:a16="http://schemas.microsoft.com/office/drawing/2014/main" id="{EB4A33F2-1F74-EA56-92EA-D2D1035A5584}"/>
+              </a:ext>
+            </a:extLst>
+          </p:cNvPr>
+          <p:cNvPicPr>
+            <a:picLocks noChangeAspect="1"/>
+          </p:cNvPicPr>
+          <p:nvPr/>
+        </p:nvPicPr>
+        <p:blipFill>
+          <a:blip r:embed="rId2">
+            <a:extLst>
+              <a:ext uri="{96DAC541-7B7A-43D3-8B79-37D633B846F1}">
+                <asvg:svgBlip xmlns:asvg="http://schemas.microsoft.com/office/drawing/2016/SVG/main" r:embed="rId3"/>
+              </a:ext>
+            </a:extLst>
+          </a:blip>
+          <a:stretch>
+            <a:fillRect/>
+          </a:stretch>
+        </p:blipFill>
+        <p:spPr>
+          <a:xfrm rot="12122174">
+            <a:off x="1345439" y="4837116"/>
+            <a:ext cx="891188" cy="891188"/>
+          </a:xfrm>
+          <a:prstGeom prst="rect">
+            <a:avLst/>
+          </a:prstGeom>
+        </p:spPr>
+      </p:pic>
+    </p:spTree>
+    <p:extLst>
+      <p:ext uri="{BB962C8B-B14F-4D97-AF65-F5344CB8AC3E}">
+        <p14:creationId xmlns:p14="http://schemas.microsoft.com/office/powerpoint/2010/main" val="1161781709"/>
       </p:ext>
     </p:extLst>
   </p:cSld>
@@ -10850,8 +11303,8 @@
         </p:nvSpPr>
         <p:spPr>
           <a:xfrm>
-            <a:off x="628649" y="2021314"/>
-            <a:ext cx="5619751" cy="2308324"/>
+            <a:off x="628649" y="2268964"/>
+            <a:ext cx="5619751" cy="2339102"/>
           </a:xfrm>
           <a:prstGeom prst="rect">
             <a:avLst/>
@@ -10876,14 +11329,14 @@
               <a:buNone/>
             </a:pPr>
             <a:r>
-              <a:rPr lang="ko-KR" altLang="en-US" sz="1600" b="1" dirty="0">
+              <a:rPr lang="ko-KR" altLang="en-US" b="1" dirty="0">
                 <a:latin typeface="D2Coding" panose="020B0609020101020101" pitchFamily="49" charset="-127"/>
                 <a:ea typeface="D2Coding" panose="020B0609020101020101" pitchFamily="49" charset="-127"/>
               </a:rPr>
               <a:t>① </a:t>
             </a:r>
             <a:r>
-              <a:rPr lang="en-US" altLang="ko-KR" sz="1600" b="1" dirty="0">
+              <a:rPr lang="en-US" altLang="ko-KR" b="1" dirty="0">
                 <a:latin typeface="D2Coding" panose="020B0609020101020101" pitchFamily="49" charset="-127"/>
                 <a:ea typeface="D2Coding" panose="020B0609020101020101" pitchFamily="49" charset="-127"/>
               </a:rPr>
@@ -11010,8 +11463,8 @@
         </p:nvSpPr>
         <p:spPr>
           <a:xfrm>
-            <a:off x="2366962" y="3175476"/>
-            <a:ext cx="6748463" cy="1815882"/>
+            <a:off x="2366962" y="3356451"/>
+            <a:ext cx="6748463" cy="1846659"/>
           </a:xfrm>
           <a:prstGeom prst="rect">
             <a:avLst/>
@@ -11036,14 +11489,14 @@
               <a:buNone/>
             </a:pPr>
             <a:r>
-              <a:rPr lang="ko-KR" altLang="en-US" sz="1600" b="1" dirty="0">
+              <a:rPr lang="ko-KR" altLang="en-US" b="1" dirty="0">
                 <a:latin typeface="D2Coding" panose="020B0609020101020101" pitchFamily="49" charset="-127"/>
                 <a:ea typeface="D2Coding" panose="020B0609020101020101" pitchFamily="49" charset="-127"/>
               </a:rPr>
               <a:t>② </a:t>
             </a:r>
             <a:r>
-              <a:rPr lang="en-US" altLang="ko-KR" sz="1600" b="1" dirty="0">
+              <a:rPr lang="en-US" altLang="ko-KR" b="1" dirty="0">
                 <a:latin typeface="D2Coding" panose="020B0609020101020101" pitchFamily="49" charset="-127"/>
                 <a:ea typeface="D2Coding" panose="020B0609020101020101" pitchFamily="49" charset="-127"/>
               </a:rPr>
@@ -11179,7 +11632,7 @@
         <p:spPr>
           <a:xfrm>
             <a:off x="5295900" y="4220476"/>
-            <a:ext cx="6495531" cy="2308324"/>
+            <a:ext cx="6495531" cy="2339102"/>
           </a:xfrm>
           <a:prstGeom prst="rect">
             <a:avLst/>
@@ -11204,14 +11657,14 @@
               <a:buNone/>
             </a:pPr>
             <a:r>
-              <a:rPr lang="ko-KR" altLang="en-US" sz="1600" b="1" dirty="0">
+              <a:rPr lang="ko-KR" altLang="en-US" b="1" dirty="0">
                 <a:latin typeface="D2Coding" panose="020B0609020101020101" pitchFamily="49" charset="-127"/>
                 <a:ea typeface="D2Coding" panose="020B0609020101020101" pitchFamily="49" charset="-127"/>
               </a:rPr>
               <a:t>③ </a:t>
             </a:r>
             <a:r>
-              <a:rPr lang="en-US" altLang="ko-KR" sz="1600" b="1" dirty="0">
+              <a:rPr lang="en-US" altLang="ko-KR" b="1" dirty="0">
                 <a:latin typeface="D2Coding" panose="020B0609020101020101" pitchFamily="49" charset="-127"/>
                 <a:ea typeface="D2Coding" panose="020B0609020101020101" pitchFamily="49" charset="-127"/>
               </a:rPr>
@@ -11353,8 +11806,8 @@
         </p:nvSpPr>
         <p:spPr>
           <a:xfrm>
-            <a:off x="475645" y="1043118"/>
-            <a:ext cx="8115301" cy="646331"/>
+            <a:off x="552449" y="1202027"/>
+            <a:ext cx="11153776" cy="880819"/>
           </a:xfrm>
           <a:prstGeom prst="rect">
             <a:avLst/>
@@ -11367,33 +11820,51 @@
           </a:bodyPr>
           <a:lstStyle/>
           <a:p>
-            <a:pPr rtl="0">
-              <a:buNone/>
+            <a:pPr marL="285750" indent="-285750">
+              <a:lnSpc>
+                <a:spcPct val="150000"/>
+              </a:lnSpc>
+              <a:buFont typeface="Wingdings" panose="05000000000000000000" pitchFamily="2" charset="2"/>
+              <a:buChar char="v"/>
             </a:pPr>
+            <a:r>
+              <a:rPr lang="en-US" altLang="ko-KR" dirty="0">
+                <a:latin typeface="D2Coding" panose="020B0609020101020101" pitchFamily="49" charset="-127"/>
+                <a:ea typeface="D2Coding" panose="020B0609020101020101" pitchFamily="49" charset="-127"/>
+              </a:rPr>
+              <a:t>Manifold = </a:t>
+            </a:r>
+            <a:r>
+              <a:rPr lang="ko-KR" altLang="en-US" dirty="0">
+                <a:latin typeface="D2Coding" panose="020B0609020101020101" pitchFamily="49" charset="-127"/>
+                <a:ea typeface="D2Coding" panose="020B0609020101020101" pitchFamily="49" charset="-127"/>
+              </a:rPr>
+              <a:t>실제 데이터들이 존재하는 고차원 공간 속의 구조적인 영역</a:t>
+            </a:r>
             <a:endParaRPr lang="en-US" altLang="ko-KR" dirty="0">
               <a:latin typeface="D2Coding" panose="020B0609020101020101" pitchFamily="49" charset="-127"/>
               <a:ea typeface="D2Coding" panose="020B0609020101020101" pitchFamily="49" charset="-127"/>
             </a:endParaRPr>
           </a:p>
           <a:p>
-            <a:pPr>
-              <a:buNone/>
+            <a:pPr marL="285750" indent="-285750">
+              <a:lnSpc>
+                <a:spcPct val="150000"/>
+              </a:lnSpc>
+              <a:buFont typeface="Wingdings" panose="05000000000000000000" pitchFamily="2" charset="2"/>
+              <a:buChar char="v"/>
             </a:pPr>
             <a:r>
               <a:rPr lang="en-US" altLang="ko-KR" dirty="0">
                 <a:latin typeface="D2Coding" panose="020B0609020101020101" pitchFamily="49" charset="-127"/>
                 <a:ea typeface="D2Coding" panose="020B0609020101020101" pitchFamily="49" charset="-127"/>
               </a:rPr>
-              <a:t>Manifold = </a:t>
-            </a:r>
-            <a:r>
-              <a:rPr lang="ko-KR" altLang="en-US" dirty="0">
-                <a:latin typeface="D2Coding" panose="020B0609020101020101" pitchFamily="49" charset="-127"/>
-                <a:ea typeface="D2Coding" panose="020B0609020101020101" pitchFamily="49" charset="-127"/>
-              </a:rPr>
-              <a:t>실제 데이터들이 존재하는 고차원 공간 속의 구조적인 영역</a:t>
-            </a:r>
-            <a:endParaRPr lang="ko-KR" altLang="en-US" dirty="0"/>
+              <a:t>Raw Data → Representation Learning → Latent Space → Data Distribution/Manifold → Generation</a:t>
+            </a:r>
+            <a:endParaRPr lang="ko-KR" altLang="en-US" dirty="0">
+              <a:latin typeface="D2Coding" panose="020B0609020101020101" pitchFamily="49" charset="-127"/>
+              <a:ea typeface="D2Coding" panose="020B0609020101020101" pitchFamily="49" charset="-127"/>
+            </a:endParaRPr>
           </a:p>
         </p:txBody>
       </p:sp>
@@ -11411,6 +11882,1742 @@
 </file>
 
 <file path=ppt/slides/slide26.xml><?xml version="1.0" encoding="utf-8"?>
+<p:sld xmlns:a="http://schemas.openxmlformats.org/drawingml/2006/main" xmlns:r="http://schemas.openxmlformats.org/officeDocument/2006/relationships" xmlns:p="http://schemas.openxmlformats.org/presentationml/2006/main">
+  <p:cSld>
+    <p:spTree>
+      <p:nvGrpSpPr>
+        <p:cNvPr id="1" name="">
+          <a:extLst>
+            <a:ext uri="{FF2B5EF4-FFF2-40B4-BE49-F238E27FC236}">
+              <a16:creationId xmlns:a16="http://schemas.microsoft.com/office/drawing/2014/main" id="{1C1EBE8B-4638-C8FD-63F0-D4DC1EC55BC5}"/>
+            </a:ext>
+          </a:extLst>
+        </p:cNvPr>
+        <p:cNvGrpSpPr/>
+        <p:nvPr/>
+      </p:nvGrpSpPr>
+      <p:grpSpPr>
+        <a:xfrm>
+          <a:off x="0" y="0"/>
+          <a:ext cx="0" cy="0"/>
+          <a:chOff x="0" y="0"/>
+          <a:chExt cx="0" cy="0"/>
+        </a:xfrm>
+      </p:grpSpPr>
+      <p:sp>
+        <p:nvSpPr>
+          <p:cNvPr id="2" name="직사각형 1">
+            <a:extLst>
+              <a:ext uri="{FF2B5EF4-FFF2-40B4-BE49-F238E27FC236}">
+                <a16:creationId xmlns:a16="http://schemas.microsoft.com/office/drawing/2014/main" id="{20C43EAB-92AE-29C7-8FC4-D709E8ECE988}"/>
+              </a:ext>
+            </a:extLst>
+          </p:cNvPr>
+          <p:cNvSpPr/>
+          <p:nvPr/>
+        </p:nvSpPr>
+        <p:spPr>
+          <a:xfrm>
+            <a:off x="5076825" y="2762250"/>
+            <a:ext cx="2838450" cy="2571750"/>
+          </a:xfrm>
+          <a:prstGeom prst="rect">
+            <a:avLst/>
+          </a:prstGeom>
+          <a:solidFill>
+            <a:schemeClr val="tx1"/>
+          </a:solidFill>
+        </p:spPr>
+        <p:style>
+          <a:lnRef idx="2">
+            <a:schemeClr val="accent1">
+              <a:shade val="15000"/>
+            </a:schemeClr>
+          </a:lnRef>
+          <a:fillRef idx="1">
+            <a:schemeClr val="accent1"/>
+          </a:fillRef>
+          <a:effectRef idx="0">
+            <a:schemeClr val="accent1"/>
+          </a:effectRef>
+          <a:fontRef idx="minor">
+            <a:schemeClr val="lt1"/>
+          </a:fontRef>
+        </p:style>
+        <p:txBody>
+          <a:bodyPr rtlCol="0" anchor="ctr"/>
+          <a:lstStyle/>
+          <a:p>
+            <a:pPr algn="ctr"/>
+            <a:endParaRPr lang="ko-KR" altLang="en-US"/>
+          </a:p>
+        </p:txBody>
+      </p:sp>
+      <p:sp>
+        <p:nvSpPr>
+          <p:cNvPr id="3" name="제목 1">
+            <a:extLst>
+              <a:ext uri="{FF2B5EF4-FFF2-40B4-BE49-F238E27FC236}">
+                <a16:creationId xmlns:a16="http://schemas.microsoft.com/office/drawing/2014/main" id="{01CDFE70-09C7-4131-C4B1-9B053596BE91}"/>
+              </a:ext>
+            </a:extLst>
+          </p:cNvPr>
+          <p:cNvSpPr txBox="1">
+            <a:spLocks/>
+          </p:cNvSpPr>
+          <p:nvPr/>
+        </p:nvSpPr>
+        <p:spPr>
+          <a:xfrm>
+            <a:off x="475645" y="481983"/>
+            <a:ext cx="10353762" cy="766439"/>
+          </a:xfrm>
+          <a:prstGeom prst="rect">
+            <a:avLst/>
+          </a:prstGeom>
+        </p:spPr>
+        <p:txBody>
+          <a:bodyPr vert="horz" lIns="91440" tIns="45720" rIns="91440" bIns="45720" rtlCol="0" anchor="ctr">
+            <a:normAutofit/>
+          </a:bodyPr>
+          <a:lstStyle>
+            <a:lvl1pPr algn="ctr" defTabSz="914400" rtl="0" eaLnBrk="1" latinLnBrk="1" hangingPunct="1">
+              <a:lnSpc>
+                <a:spcPct val="90000"/>
+              </a:lnSpc>
+              <a:spcBef>
+                <a:spcPct val="0"/>
+              </a:spcBef>
+              <a:buNone/>
+              <a:defRPr sz="3200" kern="1200" cap="all" baseline="0">
+                <a:solidFill>
+                  <a:schemeClr val="tx1"/>
+                </a:solidFill>
+                <a:effectLst/>
+                <a:latin typeface="Batang" panose="02030600000101010101" pitchFamily="18" charset="-127"/>
+                <a:ea typeface="Batang" panose="02030600000101010101" pitchFamily="18" charset="-127"/>
+                <a:cs typeface="+mj-cs"/>
+              </a:defRPr>
+            </a:lvl1pPr>
+          </a:lstStyle>
+          <a:p>
+            <a:pPr algn="l"/>
+            <a:r>
+              <a:rPr lang="en-US" altLang="ko-KR" sz="2800" cap="none" dirty="0">
+                <a:solidFill>
+                  <a:schemeClr val="bg2">
+                    <a:lumMod val="25000"/>
+                  </a:schemeClr>
+                </a:solidFill>
+                <a:latin typeface="D2Coding" panose="020B0609020101020101" pitchFamily="49" charset="-127"/>
+                <a:ea typeface="D2Coding" panose="020B0609020101020101" pitchFamily="49" charset="-127"/>
+                <a:cs typeface="Segoe UI Light" panose="020B0502040204020203" pitchFamily="34" charset="0"/>
+              </a:rPr>
+              <a:t>Generative Model</a:t>
+            </a:r>
+          </a:p>
+        </p:txBody>
+      </p:sp>
+      <p:sp>
+        <p:nvSpPr>
+          <p:cNvPr id="51" name="슬라이드 번호 개체 틀 3">
+            <a:extLst>
+              <a:ext uri="{FF2B5EF4-FFF2-40B4-BE49-F238E27FC236}">
+                <a16:creationId xmlns:a16="http://schemas.microsoft.com/office/drawing/2014/main" id="{4DE75E7F-5A47-8596-DDDE-D673158B65C4}"/>
+              </a:ext>
+            </a:extLst>
+          </p:cNvPr>
+          <p:cNvSpPr txBox="1">
+            <a:spLocks/>
+          </p:cNvSpPr>
+          <p:nvPr/>
+        </p:nvSpPr>
+        <p:spPr>
+          <a:xfrm>
+            <a:off x="11180761" y="299420"/>
+            <a:ext cx="753545" cy="365125"/>
+          </a:xfrm>
+          <a:prstGeom prst="rect">
+            <a:avLst/>
+          </a:prstGeom>
+        </p:spPr>
+        <p:txBody>
+          <a:bodyPr vert="horz" lIns="91440" tIns="45720" rIns="91440" bIns="45720" rtlCol="0" anchor="ctr"/>
+          <a:lstStyle>
+            <a:defPPr rtl="0">
+              <a:defRPr lang="ko-KR"/>
+            </a:defPPr>
+            <a:lvl1pPr marL="0" algn="r" defTabSz="914400" rtl="0" eaLnBrk="1" latinLnBrk="0" hangingPunct="1">
+              <a:defRPr sz="1200" kern="1200" baseline="0">
+                <a:solidFill>
+                  <a:schemeClr val="tx1">
+                    <a:lumMod val="65000"/>
+                    <a:lumOff val="35000"/>
+                  </a:schemeClr>
+                </a:solidFill>
+                <a:latin typeface="맑은 고딕" panose="020B0503020000020004" pitchFamily="50" charset="-127"/>
+                <a:ea typeface="맑은 고딕" panose="020B0503020000020004" pitchFamily="50" charset="-127"/>
+                <a:cs typeface="+mn-cs"/>
+              </a:defRPr>
+            </a:lvl1pPr>
+            <a:lvl2pPr marL="457200" algn="l" defTabSz="914400" rtl="0" eaLnBrk="1" latinLnBrk="0" hangingPunct="1">
+              <a:defRPr sz="1800" kern="1200">
+                <a:solidFill>
+                  <a:schemeClr val="tx1"/>
+                </a:solidFill>
+                <a:latin typeface="+mn-lt"/>
+                <a:ea typeface="+mn-ea"/>
+                <a:cs typeface="+mn-cs"/>
+              </a:defRPr>
+            </a:lvl2pPr>
+            <a:lvl3pPr marL="914400" algn="l" defTabSz="914400" rtl="0" eaLnBrk="1" latinLnBrk="0" hangingPunct="1">
+              <a:defRPr sz="1800" kern="1200">
+                <a:solidFill>
+                  <a:schemeClr val="tx1"/>
+                </a:solidFill>
+                <a:latin typeface="+mn-lt"/>
+                <a:ea typeface="+mn-ea"/>
+                <a:cs typeface="+mn-cs"/>
+              </a:defRPr>
+            </a:lvl3pPr>
+            <a:lvl4pPr marL="1371600" algn="l" defTabSz="914400" rtl="0" eaLnBrk="1" latinLnBrk="0" hangingPunct="1">
+              <a:defRPr sz="1800" kern="1200">
+                <a:solidFill>
+                  <a:schemeClr val="tx1"/>
+                </a:solidFill>
+                <a:latin typeface="+mn-lt"/>
+                <a:ea typeface="+mn-ea"/>
+                <a:cs typeface="+mn-cs"/>
+              </a:defRPr>
+            </a:lvl4pPr>
+            <a:lvl5pPr marL="1828800" algn="l" defTabSz="914400" rtl="0" eaLnBrk="1" latinLnBrk="0" hangingPunct="1">
+              <a:defRPr sz="1800" kern="1200">
+                <a:solidFill>
+                  <a:schemeClr val="tx1"/>
+                </a:solidFill>
+                <a:latin typeface="+mn-lt"/>
+                <a:ea typeface="+mn-ea"/>
+                <a:cs typeface="+mn-cs"/>
+              </a:defRPr>
+            </a:lvl5pPr>
+            <a:lvl6pPr marL="2286000" algn="l" defTabSz="914400" rtl="0" eaLnBrk="1" latinLnBrk="0" hangingPunct="1">
+              <a:defRPr sz="1800" kern="1200">
+                <a:solidFill>
+                  <a:schemeClr val="tx1"/>
+                </a:solidFill>
+                <a:latin typeface="+mn-lt"/>
+                <a:ea typeface="+mn-ea"/>
+                <a:cs typeface="+mn-cs"/>
+              </a:defRPr>
+            </a:lvl6pPr>
+            <a:lvl7pPr marL="2743200" algn="l" defTabSz="914400" rtl="0" eaLnBrk="1" latinLnBrk="0" hangingPunct="1">
+              <a:defRPr sz="1800" kern="1200">
+                <a:solidFill>
+                  <a:schemeClr val="tx1"/>
+                </a:solidFill>
+                <a:latin typeface="+mn-lt"/>
+                <a:ea typeface="+mn-ea"/>
+                <a:cs typeface="+mn-cs"/>
+              </a:defRPr>
+            </a:lvl7pPr>
+            <a:lvl8pPr marL="3200400" algn="l" defTabSz="914400" rtl="0" eaLnBrk="1" latinLnBrk="0" hangingPunct="1">
+              <a:defRPr sz="1800" kern="1200">
+                <a:solidFill>
+                  <a:schemeClr val="tx1"/>
+                </a:solidFill>
+                <a:latin typeface="+mn-lt"/>
+                <a:ea typeface="+mn-ea"/>
+                <a:cs typeface="+mn-cs"/>
+              </a:defRPr>
+            </a:lvl8pPr>
+            <a:lvl9pPr marL="3657600" algn="l" defTabSz="914400" rtl="0" eaLnBrk="1" latinLnBrk="0" hangingPunct="1">
+              <a:defRPr sz="1800" kern="1200">
+                <a:solidFill>
+                  <a:schemeClr val="tx1"/>
+                </a:solidFill>
+                <a:latin typeface="+mn-lt"/>
+                <a:ea typeface="+mn-ea"/>
+                <a:cs typeface="+mn-cs"/>
+              </a:defRPr>
+            </a:lvl9pPr>
+          </a:lstStyle>
+          <a:p>
+            <a:fld id="{D57F1E4F-1CFF-5643-939E-217C01CDF565}" type="slidenum">
+              <a:rPr lang="en-US" b="1" smtClean="0">
+                <a:latin typeface="Segoe UI Emoji" panose="020B0502040204020203" pitchFamily="34" charset="0"/>
+                <a:ea typeface="Segoe UI Emoji" panose="020B0502040204020203" pitchFamily="34" charset="0"/>
+              </a:rPr>
+              <a:pPr/>
+              <a:t>26</a:t>
+            </a:fld>
+            <a:endParaRPr lang="en-US" b="1" dirty="0">
+              <a:latin typeface="Segoe UI Emoji" panose="020B0502040204020203" pitchFamily="34" charset="0"/>
+              <a:ea typeface="Segoe UI Emoji" panose="020B0502040204020203" pitchFamily="34" charset="0"/>
+            </a:endParaRPr>
+          </a:p>
+        </p:txBody>
+      </p:sp>
+      <p:sp>
+        <p:nvSpPr>
+          <p:cNvPr id="17" name="TextBox 16">
+            <a:extLst>
+              <a:ext uri="{FF2B5EF4-FFF2-40B4-BE49-F238E27FC236}">
+                <a16:creationId xmlns:a16="http://schemas.microsoft.com/office/drawing/2014/main" id="{277A9F42-66EB-3E99-E48F-252BB5B0ED1B}"/>
+              </a:ext>
+            </a:extLst>
+          </p:cNvPr>
+          <p:cNvSpPr txBox="1"/>
+          <p:nvPr/>
+        </p:nvSpPr>
+        <p:spPr>
+          <a:xfrm>
+            <a:off x="699034" y="1186369"/>
+            <a:ext cx="10845266" cy="5479064"/>
+          </a:xfrm>
+          <a:prstGeom prst="rect">
+            <a:avLst/>
+          </a:prstGeom>
+          <a:noFill/>
+        </p:spPr>
+        <p:txBody>
+          <a:bodyPr wrap="square">
+            <a:spAutoFit/>
+          </a:bodyPr>
+          <a:lstStyle/>
+          <a:p>
+            <a:pPr marL="285750" indent="-285750">
+              <a:lnSpc>
+                <a:spcPct val="150000"/>
+              </a:lnSpc>
+              <a:buFont typeface="Wingdings" panose="05000000000000000000" pitchFamily="2" charset="2"/>
+              <a:buChar char="v"/>
+            </a:pPr>
+            <a:r>
+              <a:rPr lang="en-US" altLang="ko-KR" sz="1600" dirty="0">
+                <a:latin typeface="D2Coding" panose="020B0609020101020101" pitchFamily="49" charset="-127"/>
+                <a:ea typeface="D2Coding" panose="020B0609020101020101" pitchFamily="49" charset="-127"/>
+              </a:rPr>
+              <a:t>"</a:t>
+            </a:r>
+            <a:r>
+              <a:rPr lang="ko-KR" altLang="en-US" sz="1600" dirty="0">
+                <a:latin typeface="D2Coding" panose="020B0609020101020101" pitchFamily="49" charset="-127"/>
+                <a:ea typeface="D2Coding" panose="020B0609020101020101" pitchFamily="49" charset="-127"/>
+              </a:rPr>
+              <a:t>얼굴을 몇 개의 특징으로 표현할 수 있다면</a:t>
+            </a:r>
+            <a:r>
+              <a:rPr lang="en-US" altLang="ko-KR" sz="1600" dirty="0">
+                <a:latin typeface="D2Coding" panose="020B0609020101020101" pitchFamily="49" charset="-127"/>
+                <a:ea typeface="D2Coding" panose="020B0609020101020101" pitchFamily="49" charset="-127"/>
+              </a:rPr>
+              <a:t>, </a:t>
+            </a:r>
+            <a:r>
+              <a:rPr lang="ko-KR" altLang="en-US" sz="1600" dirty="0">
+                <a:latin typeface="D2Coding" panose="020B0609020101020101" pitchFamily="49" charset="-127"/>
+                <a:ea typeface="D2Coding" panose="020B0609020101020101" pitchFamily="49" charset="-127"/>
+              </a:rPr>
+              <a:t>반대로 그 특징을 이용해서 얼굴을 다시 만들어낼 수 있을까</a:t>
+            </a:r>
+            <a:r>
+              <a:rPr lang="en-US" altLang="ko-KR" sz="1600" dirty="0">
+                <a:latin typeface="D2Coding" panose="020B0609020101020101" pitchFamily="49" charset="-127"/>
+                <a:ea typeface="D2Coding" panose="020B0609020101020101" pitchFamily="49" charset="-127"/>
+              </a:rPr>
+              <a:t>?“</a:t>
+            </a:r>
+          </a:p>
+          <a:p>
+            <a:pPr marL="285750" indent="-285750">
+              <a:lnSpc>
+                <a:spcPct val="150000"/>
+              </a:lnSpc>
+              <a:buFont typeface="Wingdings" panose="05000000000000000000" pitchFamily="2" charset="2"/>
+              <a:buChar char="v"/>
+            </a:pPr>
+            <a:endParaRPr lang="en-US" altLang="ko-KR" sz="700" dirty="0">
+              <a:latin typeface="D2Coding" panose="020B0609020101020101" pitchFamily="49" charset="-127"/>
+              <a:ea typeface="D2Coding" panose="020B0609020101020101" pitchFamily="49" charset="-127"/>
+            </a:endParaRPr>
+          </a:p>
+          <a:p>
+            <a:pPr marL="285750" indent="-285750">
+              <a:lnSpc>
+                <a:spcPct val="150000"/>
+              </a:lnSpc>
+              <a:buFont typeface="Wingdings" panose="05000000000000000000" pitchFamily="2" charset="2"/>
+              <a:buChar char="v"/>
+            </a:pPr>
+            <a:r>
+              <a:rPr lang="ko-KR" altLang="en-US" sz="1600" dirty="0">
+                <a:latin typeface="D2Coding" panose="020B0609020101020101" pitchFamily="49" charset="-127"/>
+                <a:ea typeface="D2Coding" panose="020B0609020101020101" pitchFamily="49" charset="-127"/>
+              </a:rPr>
+              <a:t>예를 들어 어떤 얼굴을 다음과 같이 표현했다고 생각하면 </a:t>
+            </a:r>
+            <a:r>
+              <a:rPr lang="en-US" altLang="ko-KR" sz="1600" dirty="0">
+                <a:latin typeface="D2Coding" panose="020B0609020101020101" pitchFamily="49" charset="-127"/>
+                <a:ea typeface="D2Coding" panose="020B0609020101020101" pitchFamily="49" charset="-127"/>
+              </a:rPr>
+              <a:t>z = [</a:t>
+            </a:r>
+            <a:r>
+              <a:rPr lang="ko-KR" altLang="en-US" sz="1600" dirty="0">
+                <a:latin typeface="D2Coding" panose="020B0609020101020101" pitchFamily="49" charset="-127"/>
+                <a:ea typeface="D2Coding" panose="020B0609020101020101" pitchFamily="49" charset="-127"/>
+              </a:rPr>
+              <a:t>얼굴형</a:t>
+            </a:r>
+            <a:r>
+              <a:rPr lang="en-US" altLang="ko-KR" sz="1600" dirty="0">
+                <a:latin typeface="D2Coding" panose="020B0609020101020101" pitchFamily="49" charset="-127"/>
+                <a:ea typeface="D2Coding" panose="020B0609020101020101" pitchFamily="49" charset="-127"/>
+              </a:rPr>
+              <a:t>, </a:t>
+            </a:r>
+            <a:r>
+              <a:rPr lang="ko-KR" altLang="en-US" sz="1600" dirty="0">
+                <a:latin typeface="D2Coding" panose="020B0609020101020101" pitchFamily="49" charset="-127"/>
+                <a:ea typeface="D2Coding" panose="020B0609020101020101" pitchFamily="49" charset="-127"/>
+              </a:rPr>
+              <a:t>피부 특성</a:t>
+            </a:r>
+            <a:r>
+              <a:rPr lang="en-US" altLang="ko-KR" sz="1600" dirty="0">
+                <a:latin typeface="D2Coding" panose="020B0609020101020101" pitchFamily="49" charset="-127"/>
+                <a:ea typeface="D2Coding" panose="020B0609020101020101" pitchFamily="49" charset="-127"/>
+              </a:rPr>
+              <a:t>, </a:t>
+            </a:r>
+            <a:r>
+              <a:rPr lang="ko-KR" altLang="en-US" sz="1600" dirty="0">
+                <a:latin typeface="D2Coding" panose="020B0609020101020101" pitchFamily="49" charset="-127"/>
+                <a:ea typeface="D2Coding" panose="020B0609020101020101" pitchFamily="49" charset="-127"/>
+              </a:rPr>
+              <a:t>눈 모양</a:t>
+            </a:r>
+            <a:r>
+              <a:rPr lang="en-US" altLang="ko-KR" sz="1600" dirty="0">
+                <a:latin typeface="D2Coding" panose="020B0609020101020101" pitchFamily="49" charset="-127"/>
+                <a:ea typeface="D2Coding" panose="020B0609020101020101" pitchFamily="49" charset="-127"/>
+              </a:rPr>
+              <a:t>, </a:t>
+            </a:r>
+            <a:r>
+              <a:rPr lang="ko-KR" altLang="en-US" sz="1600" dirty="0">
+                <a:latin typeface="D2Coding" panose="020B0609020101020101" pitchFamily="49" charset="-127"/>
+                <a:ea typeface="D2Coding" panose="020B0609020101020101" pitchFamily="49" charset="-127"/>
+              </a:rPr>
+              <a:t>코 모양</a:t>
+            </a:r>
+            <a:r>
+              <a:rPr lang="en-US" altLang="ko-KR" sz="1600" dirty="0">
+                <a:latin typeface="D2Coding" panose="020B0609020101020101" pitchFamily="49" charset="-127"/>
+                <a:ea typeface="D2Coding" panose="020B0609020101020101" pitchFamily="49" charset="-127"/>
+              </a:rPr>
+              <a:t>, </a:t>
+            </a:r>
+            <a:r>
+              <a:rPr lang="ko-KR" altLang="en-US" sz="1600" dirty="0">
+                <a:latin typeface="D2Coding" panose="020B0609020101020101" pitchFamily="49" charset="-127"/>
+                <a:ea typeface="D2Coding" panose="020B0609020101020101" pitchFamily="49" charset="-127"/>
+              </a:rPr>
+              <a:t>입 모양</a:t>
+            </a:r>
+            <a:r>
+              <a:rPr lang="en-US" altLang="ko-KR" sz="1600" dirty="0">
+                <a:latin typeface="D2Coding" panose="020B0609020101020101" pitchFamily="49" charset="-127"/>
+                <a:ea typeface="D2Coding" panose="020B0609020101020101" pitchFamily="49" charset="-127"/>
+              </a:rPr>
+              <a:t>, </a:t>
+            </a:r>
+            <a:r>
+              <a:rPr lang="ko-KR" altLang="en-US" sz="1600" dirty="0">
+                <a:latin typeface="D2Coding" panose="020B0609020101020101" pitchFamily="49" charset="-127"/>
+                <a:ea typeface="D2Coding" panose="020B0609020101020101" pitchFamily="49" charset="-127"/>
+              </a:rPr>
+              <a:t>머리카락</a:t>
+            </a:r>
+            <a:r>
+              <a:rPr lang="en-US" altLang="ko-KR" sz="1600" dirty="0">
+                <a:latin typeface="D2Coding" panose="020B0609020101020101" pitchFamily="49" charset="-127"/>
+                <a:ea typeface="D2Coding" panose="020B0609020101020101" pitchFamily="49" charset="-127"/>
+              </a:rPr>
+              <a:t>, </a:t>
+            </a:r>
+            <a:r>
+              <a:rPr lang="ko-KR" altLang="en-US" sz="1600" dirty="0">
+                <a:latin typeface="D2Coding" panose="020B0609020101020101" pitchFamily="49" charset="-127"/>
+                <a:ea typeface="D2Coding" panose="020B0609020101020101" pitchFamily="49" charset="-127"/>
+              </a:rPr>
+              <a:t>안경</a:t>
+            </a:r>
+            <a:r>
+              <a:rPr lang="en-US" altLang="ko-KR" sz="1600" dirty="0">
+                <a:latin typeface="D2Coding" panose="020B0609020101020101" pitchFamily="49" charset="-127"/>
+                <a:ea typeface="D2Coding" panose="020B0609020101020101" pitchFamily="49" charset="-127"/>
+              </a:rPr>
+              <a:t>, </a:t>
+            </a:r>
+            <a:r>
+              <a:rPr lang="ko-KR" altLang="en-US" sz="1600" dirty="0">
+                <a:latin typeface="D2Coding" panose="020B0609020101020101" pitchFamily="49" charset="-127"/>
+                <a:ea typeface="D2Coding" panose="020B0609020101020101" pitchFamily="49" charset="-127"/>
+              </a:rPr>
+              <a:t>표정</a:t>
+            </a:r>
+            <a:r>
+              <a:rPr lang="en-US" altLang="ko-KR" sz="1600" dirty="0">
+                <a:latin typeface="D2Coding" panose="020B0609020101020101" pitchFamily="49" charset="-127"/>
+                <a:ea typeface="D2Coding" panose="020B0609020101020101" pitchFamily="49" charset="-127"/>
+              </a:rPr>
+              <a:t>, ...] </a:t>
+            </a:r>
+            <a:r>
+              <a:rPr lang="en-US" altLang="ko-KR" sz="1600" b="1" dirty="0">
+                <a:latin typeface="D2Coding" panose="020B0609020101020101" pitchFamily="49" charset="-127"/>
+                <a:ea typeface="D2Coding" panose="020B0609020101020101" pitchFamily="49" charset="-127"/>
+                <a:sym typeface="Wingdings" panose="05000000000000000000" pitchFamily="2" charset="2"/>
+              </a:rPr>
+              <a:t> </a:t>
+            </a:r>
+            <a:r>
+              <a:rPr lang="ko-KR" altLang="en-US" sz="1600" dirty="0">
+                <a:latin typeface="D2Coding" panose="020B0609020101020101" pitchFamily="49" charset="-127"/>
+                <a:ea typeface="D2Coding" panose="020B0609020101020101" pitchFamily="49" charset="-127"/>
+                <a:sym typeface="Wingdings" panose="05000000000000000000" pitchFamily="2" charset="2"/>
+              </a:rPr>
+              <a:t>이것이</a:t>
+            </a:r>
+            <a:r>
+              <a:rPr lang="en-US" altLang="ko-KR" sz="1600" dirty="0">
+                <a:latin typeface="D2Coding" panose="020B0609020101020101" pitchFamily="49" charset="-127"/>
+                <a:ea typeface="D2Coding" panose="020B0609020101020101" pitchFamily="49" charset="-127"/>
+                <a:sym typeface="Wingdings" panose="05000000000000000000" pitchFamily="2" charset="2"/>
+              </a:rPr>
+              <a:t> </a:t>
+            </a:r>
+            <a:r>
+              <a:rPr lang="en-US" altLang="ko-KR" sz="1600" b="1" dirty="0">
+                <a:latin typeface="D2Coding" panose="020B0609020101020101" pitchFamily="49" charset="-127"/>
+                <a:ea typeface="D2Coding" panose="020B0609020101020101" pitchFamily="49" charset="-127"/>
+              </a:rPr>
+              <a:t>latent representation</a:t>
+            </a:r>
+            <a:r>
+              <a:rPr lang="en-US" altLang="ko-KR" sz="1600" dirty="0">
+                <a:latin typeface="D2Coding" panose="020B0609020101020101" pitchFamily="49" charset="-127"/>
+                <a:ea typeface="D2Coding" panose="020B0609020101020101" pitchFamily="49" charset="-127"/>
+              </a:rPr>
+              <a:t>, </a:t>
+            </a:r>
+            <a:r>
+              <a:rPr lang="ko-KR" altLang="en-US" sz="1600" dirty="0">
+                <a:latin typeface="D2Coding" panose="020B0609020101020101" pitchFamily="49" charset="-127"/>
+                <a:ea typeface="D2Coding" panose="020B0609020101020101" pitchFamily="49" charset="-127"/>
+              </a:rPr>
+              <a:t>또는 </a:t>
+            </a:r>
+            <a:r>
+              <a:rPr lang="en-US" altLang="ko-KR" sz="1600" b="1" dirty="0">
+                <a:latin typeface="D2Coding" panose="020B0609020101020101" pitchFamily="49" charset="-127"/>
+                <a:ea typeface="D2Coding" panose="020B0609020101020101" pitchFamily="49" charset="-127"/>
+              </a:rPr>
+              <a:t>latent vector</a:t>
+            </a:r>
+            <a:r>
+              <a:rPr lang="ko-KR" altLang="en-US" sz="1600" dirty="0">
+                <a:latin typeface="D2Coding" panose="020B0609020101020101" pitchFamily="49" charset="-127"/>
+                <a:ea typeface="D2Coding" panose="020B0609020101020101" pitchFamily="49" charset="-127"/>
+              </a:rPr>
+              <a:t>이며 즉</a:t>
+            </a:r>
+            <a:endParaRPr lang="en-US" altLang="ko-KR" sz="1600" dirty="0">
+              <a:latin typeface="D2Coding" panose="020B0609020101020101" pitchFamily="49" charset="-127"/>
+              <a:ea typeface="D2Coding" panose="020B0609020101020101" pitchFamily="49" charset="-127"/>
+            </a:endParaRPr>
+          </a:p>
+          <a:p>
+            <a:pPr marL="285750" indent="-285750">
+              <a:lnSpc>
+                <a:spcPct val="150000"/>
+              </a:lnSpc>
+              <a:buFont typeface="Wingdings" panose="05000000000000000000" pitchFamily="2" charset="2"/>
+              <a:buChar char="v"/>
+            </a:pPr>
+            <a:endParaRPr lang="ko-KR" altLang="en-US" sz="1600" dirty="0">
+              <a:solidFill>
+                <a:schemeClr val="bg1"/>
+              </a:solidFill>
+              <a:latin typeface="D2Coding" panose="020B0609020101020101" pitchFamily="49" charset="-127"/>
+              <a:ea typeface="D2Coding" panose="020B0609020101020101" pitchFamily="49" charset="-127"/>
+            </a:endParaRPr>
+          </a:p>
+          <a:p>
+            <a:pPr algn="ctr" rtl="0">
+              <a:buNone/>
+            </a:pPr>
+            <a:r>
+              <a:rPr lang="ko-KR" altLang="en-US" sz="1600" dirty="0">
+                <a:solidFill>
+                  <a:schemeClr val="bg1"/>
+                </a:solidFill>
+                <a:latin typeface="D2Coding" panose="020B0609020101020101" pitchFamily="49" charset="-127"/>
+                <a:ea typeface="D2Coding" panose="020B0609020101020101" pitchFamily="49" charset="-127"/>
+              </a:rPr>
+              <a:t>     얼굴 이미지</a:t>
+            </a:r>
+          </a:p>
+          <a:p>
+            <a:pPr algn="ctr" rtl="0">
+              <a:buNone/>
+            </a:pPr>
+            <a:r>
+              <a:rPr lang="ko-KR" altLang="en-US" sz="1600" dirty="0">
+                <a:solidFill>
+                  <a:schemeClr val="bg1"/>
+                </a:solidFill>
+                <a:latin typeface="D2Coding" panose="020B0609020101020101" pitchFamily="49" charset="-127"/>
+                <a:ea typeface="D2Coding" panose="020B0609020101020101" pitchFamily="49" charset="-127"/>
+              </a:rPr>
+              <a:t>      ↓</a:t>
+            </a:r>
+          </a:p>
+          <a:p>
+            <a:pPr algn="ctr" rtl="0">
+              <a:buNone/>
+            </a:pPr>
+            <a:r>
+              <a:rPr lang="en-US" altLang="ko-KR" sz="1600" dirty="0">
+                <a:solidFill>
+                  <a:schemeClr val="bg1"/>
+                </a:solidFill>
+                <a:latin typeface="D2Coding" panose="020B0609020101020101" pitchFamily="49" charset="-127"/>
+                <a:ea typeface="D2Coding" panose="020B0609020101020101" pitchFamily="49" charset="-127"/>
+              </a:rPr>
+              <a:t>      Encoder</a:t>
+            </a:r>
+          </a:p>
+          <a:p>
+            <a:pPr algn="ctr" rtl="0">
+              <a:buNone/>
+            </a:pPr>
+            <a:r>
+              <a:rPr lang="en-US" altLang="ko-KR" sz="1600" dirty="0">
+                <a:solidFill>
+                  <a:schemeClr val="bg1"/>
+                </a:solidFill>
+                <a:latin typeface="D2Coding" panose="020B0609020101020101" pitchFamily="49" charset="-127"/>
+                <a:ea typeface="D2Coding" panose="020B0609020101020101" pitchFamily="49" charset="-127"/>
+              </a:rPr>
+              <a:t>      ↓</a:t>
+            </a:r>
+          </a:p>
+          <a:p>
+            <a:pPr algn="ctr" rtl="0">
+              <a:buNone/>
+            </a:pPr>
+            <a:r>
+              <a:rPr lang="en-US" altLang="ko-KR" sz="1600" dirty="0">
+                <a:solidFill>
+                  <a:schemeClr val="bg1"/>
+                </a:solidFill>
+                <a:latin typeface="D2Coding" panose="020B0609020101020101" pitchFamily="49" charset="-127"/>
+                <a:ea typeface="D2Coding" panose="020B0609020101020101" pitchFamily="49" charset="-127"/>
+              </a:rPr>
+              <a:t>        Latent representation z</a:t>
+            </a:r>
+          </a:p>
+          <a:p>
+            <a:pPr algn="ctr" rtl="0">
+              <a:buNone/>
+            </a:pPr>
+            <a:r>
+              <a:rPr lang="en-US" altLang="ko-KR" sz="1600" dirty="0">
+                <a:solidFill>
+                  <a:schemeClr val="bg1"/>
+                </a:solidFill>
+                <a:latin typeface="D2Coding" panose="020B0609020101020101" pitchFamily="49" charset="-127"/>
+                <a:ea typeface="D2Coding" panose="020B0609020101020101" pitchFamily="49" charset="-127"/>
+              </a:rPr>
+              <a:t>      ↓</a:t>
+            </a:r>
+          </a:p>
+          <a:p>
+            <a:pPr algn="ctr" rtl="0">
+              <a:buNone/>
+            </a:pPr>
+            <a:r>
+              <a:rPr lang="en-US" altLang="ko-KR" sz="1600" dirty="0">
+                <a:solidFill>
+                  <a:schemeClr val="bg1"/>
+                </a:solidFill>
+                <a:latin typeface="D2Coding" panose="020B0609020101020101" pitchFamily="49" charset="-127"/>
+                <a:ea typeface="D2Coding" panose="020B0609020101020101" pitchFamily="49" charset="-127"/>
+              </a:rPr>
+              <a:t>         Decoder / Generator</a:t>
+            </a:r>
+          </a:p>
+          <a:p>
+            <a:pPr algn="ctr" rtl="0">
+              <a:buNone/>
+            </a:pPr>
+            <a:r>
+              <a:rPr lang="en-US" altLang="ko-KR" sz="1600" dirty="0">
+                <a:solidFill>
+                  <a:schemeClr val="bg1"/>
+                </a:solidFill>
+                <a:latin typeface="D2Coding" panose="020B0609020101020101" pitchFamily="49" charset="-127"/>
+                <a:ea typeface="D2Coding" panose="020B0609020101020101" pitchFamily="49" charset="-127"/>
+              </a:rPr>
+              <a:t>      ↓</a:t>
+            </a:r>
+          </a:p>
+          <a:p>
+            <a:pPr algn="ctr" rtl="0">
+              <a:buNone/>
+            </a:pPr>
+            <a:r>
+              <a:rPr lang="ko-KR" altLang="en-US" sz="1600" dirty="0">
+                <a:solidFill>
+                  <a:schemeClr val="bg1"/>
+                </a:solidFill>
+                <a:latin typeface="D2Coding" panose="020B0609020101020101" pitchFamily="49" charset="-127"/>
+                <a:ea typeface="D2Coding" panose="020B0609020101020101" pitchFamily="49" charset="-127"/>
+              </a:rPr>
+              <a:t>      얼굴 이미지</a:t>
+            </a:r>
+            <a:endParaRPr lang="en-US" altLang="ko-KR" sz="1600" dirty="0">
+              <a:solidFill>
+                <a:schemeClr val="bg1"/>
+              </a:solidFill>
+              <a:latin typeface="D2Coding" panose="020B0609020101020101" pitchFamily="49" charset="-127"/>
+              <a:ea typeface="D2Coding" panose="020B0609020101020101" pitchFamily="49" charset="-127"/>
+            </a:endParaRPr>
+          </a:p>
+          <a:p>
+            <a:pPr>
+              <a:lnSpc>
+                <a:spcPct val="150000"/>
+              </a:lnSpc>
+              <a:buNone/>
+            </a:pPr>
+            <a:endParaRPr lang="en-US" altLang="ko-KR" sz="1600" dirty="0">
+              <a:latin typeface="D2Coding" panose="020B0609020101020101" pitchFamily="49" charset="-127"/>
+              <a:ea typeface="D2Coding" panose="020B0609020101020101" pitchFamily="49" charset="-127"/>
+            </a:endParaRPr>
+          </a:p>
+          <a:p>
+            <a:pPr>
+              <a:lnSpc>
+                <a:spcPct val="150000"/>
+              </a:lnSpc>
+              <a:buNone/>
+            </a:pPr>
+            <a:r>
+              <a:rPr lang="en-US" altLang="ko-KR" sz="1600" dirty="0">
+                <a:latin typeface="D2Coding" panose="020B0609020101020101" pitchFamily="49" charset="-127"/>
+                <a:ea typeface="D2Coding" panose="020B0609020101020101" pitchFamily="49" charset="-127"/>
+                <a:sym typeface="Wingdings" panose="05000000000000000000" pitchFamily="2" charset="2"/>
+              </a:rPr>
+              <a:t>	 </a:t>
+            </a:r>
+            <a:r>
+              <a:rPr lang="ko-KR" altLang="en-US" sz="1600" dirty="0">
+                <a:latin typeface="D2Coding" panose="020B0609020101020101" pitchFamily="49" charset="-127"/>
+                <a:ea typeface="D2Coding" panose="020B0609020101020101" pitchFamily="49" charset="-127"/>
+              </a:rPr>
+              <a:t>즉</a:t>
+            </a:r>
+            <a:r>
+              <a:rPr lang="en-US" altLang="ko-KR" sz="1600" dirty="0">
+                <a:latin typeface="D2Coding" panose="020B0609020101020101" pitchFamily="49" charset="-127"/>
+                <a:ea typeface="D2Coding" panose="020B0609020101020101" pitchFamily="49" charset="-127"/>
+              </a:rPr>
+              <a:t>, </a:t>
+            </a:r>
+            <a:r>
+              <a:rPr lang="ko-KR" altLang="en-US" sz="1600" dirty="0">
+                <a:latin typeface="D2Coding" panose="020B0609020101020101" pitchFamily="49" charset="-127"/>
+                <a:ea typeface="D2Coding" panose="020B0609020101020101" pitchFamily="49" charset="-127"/>
+              </a:rPr>
+              <a:t>이미지 → 의미 있는 내부 표현 → 다시 이미지가 되는 것</a:t>
+            </a:r>
+            <a:endParaRPr lang="en-US" altLang="ko-KR" sz="1600" dirty="0">
+              <a:latin typeface="D2Coding" panose="020B0609020101020101" pitchFamily="49" charset="-127"/>
+              <a:ea typeface="D2Coding" panose="020B0609020101020101" pitchFamily="49" charset="-127"/>
+            </a:endParaRPr>
+          </a:p>
+          <a:p>
+            <a:pPr lvl="3">
+              <a:lnSpc>
+                <a:spcPct val="150000"/>
+              </a:lnSpc>
+            </a:pPr>
+            <a:r>
+              <a:rPr lang="en-US" altLang="ko-KR" sz="1400" dirty="0">
+                <a:latin typeface="D2Coding" panose="020B0609020101020101" pitchFamily="49" charset="-127"/>
+                <a:ea typeface="D2Coding" panose="020B0609020101020101" pitchFamily="49" charset="-127"/>
+              </a:rPr>
+              <a:t>         </a:t>
+            </a:r>
+            <a:r>
+              <a:rPr lang="en-US" altLang="ko-KR" sz="1400" dirty="0">
+                <a:latin typeface="D2Coding" panose="020B0609020101020101" pitchFamily="49" charset="-127"/>
+                <a:ea typeface="D2Coding" panose="020B0609020101020101" pitchFamily="49" charset="-127"/>
+                <a:sym typeface="Wingdings" panose="05000000000000000000" pitchFamily="2" charset="2"/>
+              </a:rPr>
+              <a:t> </a:t>
+            </a:r>
+            <a:r>
+              <a:rPr lang="ko-KR" altLang="en-US" sz="1400" dirty="0">
+                <a:latin typeface="D2Coding" panose="020B0609020101020101" pitchFamily="49" charset="-127"/>
+                <a:ea typeface="D2Coding" panose="020B0609020101020101" pitchFamily="49" charset="-127"/>
+                <a:sym typeface="Wingdings" panose="05000000000000000000" pitchFamily="2" charset="2"/>
+              </a:rPr>
+              <a:t>선형구조를 가진 데이터의 주성분분석</a:t>
+            </a:r>
+            <a:r>
+              <a:rPr lang="en-US" altLang="ko-KR" sz="1400" dirty="0">
+                <a:latin typeface="D2Coding" panose="020B0609020101020101" pitchFamily="49" charset="-127"/>
+                <a:ea typeface="D2Coding" panose="020B0609020101020101" pitchFamily="49" charset="-127"/>
+                <a:sym typeface="Wingdings" panose="05000000000000000000" pitchFamily="2" charset="2"/>
+              </a:rPr>
+              <a:t>(</a:t>
+            </a:r>
+            <a:r>
+              <a:rPr lang="en-US" altLang="ko-KR" sz="1400" dirty="0">
+                <a:latin typeface="D2Coding" panose="020B0609020101020101" pitchFamily="49" charset="-127"/>
+                <a:ea typeface="D2Coding" panose="020B0609020101020101" pitchFamily="49" charset="-127"/>
+                <a:sym typeface="Wingdings" panose="05000000000000000000" pitchFamily="2" charset="2"/>
+                <a:hlinkClick r:id="rId2"/>
+              </a:rPr>
+              <a:t>principal-component-analysis</a:t>
+            </a:r>
+            <a:r>
+              <a:rPr lang="en-US" altLang="ko-KR" sz="1400" dirty="0">
+                <a:latin typeface="D2Coding" panose="020B0609020101020101" pitchFamily="49" charset="-127"/>
+                <a:ea typeface="D2Coding" panose="020B0609020101020101" pitchFamily="49" charset="-127"/>
+                <a:sym typeface="Wingdings" panose="05000000000000000000" pitchFamily="2" charset="2"/>
+              </a:rPr>
+              <a:t>)</a:t>
+            </a:r>
+          </a:p>
+          <a:p>
+            <a:pPr lvl="3">
+              <a:lnSpc>
+                <a:spcPct val="150000"/>
+              </a:lnSpc>
+            </a:pPr>
+            <a:r>
+              <a:rPr lang="en-US" altLang="ko-KR" sz="1400" dirty="0">
+                <a:latin typeface="D2Coding" panose="020B0609020101020101" pitchFamily="49" charset="-127"/>
+                <a:ea typeface="D2Coding" panose="020B0609020101020101" pitchFamily="49" charset="-127"/>
+              </a:rPr>
+              <a:t>         </a:t>
+            </a:r>
+            <a:r>
+              <a:rPr lang="en-US" altLang="ko-KR" sz="1400" dirty="0">
+                <a:latin typeface="D2Coding" panose="020B0609020101020101" pitchFamily="49" charset="-127"/>
+                <a:ea typeface="D2Coding" panose="020B0609020101020101" pitchFamily="49" charset="-127"/>
+                <a:sym typeface="Wingdings" panose="05000000000000000000" pitchFamily="2" charset="2"/>
+              </a:rPr>
+              <a:t> </a:t>
+            </a:r>
+            <a:r>
+              <a:rPr lang="ko-KR" altLang="en-US" sz="1400" dirty="0">
+                <a:latin typeface="D2Coding" panose="020B0609020101020101" pitchFamily="49" charset="-127"/>
+                <a:ea typeface="D2Coding" panose="020B0609020101020101" pitchFamily="49" charset="-127"/>
+                <a:sym typeface="Wingdings" panose="05000000000000000000" pitchFamily="2" charset="2"/>
+              </a:rPr>
+              <a:t>비선형구조를 가진 데이터의 </a:t>
+            </a:r>
+            <a:r>
+              <a:rPr lang="en-US" altLang="ko-KR" sz="1400" dirty="0">
+                <a:latin typeface="D2Coding" panose="020B0609020101020101" pitchFamily="49" charset="-127"/>
+                <a:ea typeface="D2Coding" panose="020B0609020101020101" pitchFamily="49" charset="-127"/>
+                <a:sym typeface="Wingdings" panose="05000000000000000000" pitchFamily="2" charset="2"/>
+              </a:rPr>
+              <a:t>Manifold Learning(</a:t>
+            </a:r>
+            <a:r>
+              <a:rPr lang="en-US" altLang="ko-KR" sz="1400" dirty="0">
+                <a:latin typeface="D2Coding" panose="020B0609020101020101" pitchFamily="49" charset="-127"/>
+                <a:ea typeface="D2Coding" panose="020B0609020101020101" pitchFamily="49" charset="-127"/>
+                <a:sym typeface="Wingdings" panose="05000000000000000000" pitchFamily="2" charset="2"/>
+                <a:hlinkClick r:id="rId3"/>
+              </a:rPr>
+              <a:t>manifold-learning</a:t>
+            </a:r>
+            <a:r>
+              <a:rPr lang="en-US" altLang="ko-KR" sz="1400" dirty="0">
+                <a:latin typeface="D2Coding" panose="020B0609020101020101" pitchFamily="49" charset="-127"/>
+                <a:ea typeface="D2Coding" panose="020B0609020101020101" pitchFamily="49" charset="-127"/>
+                <a:sym typeface="Wingdings" panose="05000000000000000000" pitchFamily="2" charset="2"/>
+              </a:rPr>
+              <a:t>)</a:t>
+            </a:r>
+            <a:endParaRPr lang="en-US" altLang="ko-KR" sz="1400" dirty="0">
+              <a:latin typeface="D2Coding" panose="020B0609020101020101" pitchFamily="49" charset="-127"/>
+              <a:ea typeface="D2Coding" panose="020B0609020101020101" pitchFamily="49" charset="-127"/>
+            </a:endParaRPr>
+          </a:p>
+        </p:txBody>
+      </p:sp>
+    </p:spTree>
+    <p:extLst>
+      <p:ext uri="{BB962C8B-B14F-4D97-AF65-F5344CB8AC3E}">
+        <p14:creationId xmlns:p14="http://schemas.microsoft.com/office/powerpoint/2010/main" val="1398622905"/>
+      </p:ext>
+    </p:extLst>
+  </p:cSld>
+  <p:clrMapOvr>
+    <a:masterClrMapping/>
+  </p:clrMapOvr>
+</p:sld>
+</file>
+
+<file path=ppt/slides/slide27.xml><?xml version="1.0" encoding="utf-8"?>
+<p:sld xmlns:a="http://schemas.openxmlformats.org/drawingml/2006/main" xmlns:r="http://schemas.openxmlformats.org/officeDocument/2006/relationships" xmlns:p="http://schemas.openxmlformats.org/presentationml/2006/main">
+  <p:cSld>
+    <p:spTree>
+      <p:nvGrpSpPr>
+        <p:cNvPr id="1" name="">
+          <a:extLst>
+            <a:ext uri="{FF2B5EF4-FFF2-40B4-BE49-F238E27FC236}">
+              <a16:creationId xmlns:a16="http://schemas.microsoft.com/office/drawing/2014/main" id="{D2335063-C2D5-9F8A-5E6C-603DA5DB7246}"/>
+            </a:ext>
+          </a:extLst>
+        </p:cNvPr>
+        <p:cNvGrpSpPr/>
+        <p:nvPr/>
+      </p:nvGrpSpPr>
+      <p:grpSpPr>
+        <a:xfrm>
+          <a:off x="0" y="0"/>
+          <a:ext cx="0" cy="0"/>
+          <a:chOff x="0" y="0"/>
+          <a:chExt cx="0" cy="0"/>
+        </a:xfrm>
+      </p:grpSpPr>
+      <p:sp>
+        <p:nvSpPr>
+          <p:cNvPr id="2" name="직사각형 1">
+            <a:extLst>
+              <a:ext uri="{FF2B5EF4-FFF2-40B4-BE49-F238E27FC236}">
+                <a16:creationId xmlns:a16="http://schemas.microsoft.com/office/drawing/2014/main" id="{8010BC49-337A-CD15-BCFD-9C740425182A}"/>
+              </a:ext>
+            </a:extLst>
+          </p:cNvPr>
+          <p:cNvSpPr/>
+          <p:nvPr/>
+        </p:nvSpPr>
+        <p:spPr>
+          <a:xfrm>
+            <a:off x="4067175" y="2857500"/>
+            <a:ext cx="4476750" cy="2647950"/>
+          </a:xfrm>
+          <a:prstGeom prst="rect">
+            <a:avLst/>
+          </a:prstGeom>
+          <a:solidFill>
+            <a:schemeClr val="tx1"/>
+          </a:solidFill>
+        </p:spPr>
+        <p:style>
+          <a:lnRef idx="2">
+            <a:schemeClr val="accent1">
+              <a:shade val="15000"/>
+            </a:schemeClr>
+          </a:lnRef>
+          <a:fillRef idx="1">
+            <a:schemeClr val="accent1"/>
+          </a:fillRef>
+          <a:effectRef idx="0">
+            <a:schemeClr val="accent1"/>
+          </a:effectRef>
+          <a:fontRef idx="minor">
+            <a:schemeClr val="lt1"/>
+          </a:fontRef>
+        </p:style>
+        <p:txBody>
+          <a:bodyPr rtlCol="0" anchor="ctr"/>
+          <a:lstStyle/>
+          <a:p>
+            <a:pPr algn="ctr"/>
+            <a:endParaRPr lang="ko-KR" altLang="en-US"/>
+          </a:p>
+        </p:txBody>
+      </p:sp>
+      <p:sp>
+        <p:nvSpPr>
+          <p:cNvPr id="3" name="제목 1">
+            <a:extLst>
+              <a:ext uri="{FF2B5EF4-FFF2-40B4-BE49-F238E27FC236}">
+                <a16:creationId xmlns:a16="http://schemas.microsoft.com/office/drawing/2014/main" id="{2BEFCF6A-6F8E-F25A-1851-7C1EFA46184D}"/>
+              </a:ext>
+            </a:extLst>
+          </p:cNvPr>
+          <p:cNvSpPr txBox="1">
+            <a:spLocks/>
+          </p:cNvSpPr>
+          <p:nvPr/>
+        </p:nvSpPr>
+        <p:spPr>
+          <a:xfrm>
+            <a:off x="475645" y="481983"/>
+            <a:ext cx="10353762" cy="766439"/>
+          </a:xfrm>
+          <a:prstGeom prst="rect">
+            <a:avLst/>
+          </a:prstGeom>
+        </p:spPr>
+        <p:txBody>
+          <a:bodyPr vert="horz" lIns="91440" tIns="45720" rIns="91440" bIns="45720" rtlCol="0" anchor="ctr">
+            <a:normAutofit/>
+          </a:bodyPr>
+          <a:lstStyle>
+            <a:lvl1pPr algn="ctr" defTabSz="914400" rtl="0" eaLnBrk="1" latinLnBrk="1" hangingPunct="1">
+              <a:lnSpc>
+                <a:spcPct val="90000"/>
+              </a:lnSpc>
+              <a:spcBef>
+                <a:spcPct val="0"/>
+              </a:spcBef>
+              <a:buNone/>
+              <a:defRPr sz="3200" kern="1200" cap="all" baseline="0">
+                <a:solidFill>
+                  <a:schemeClr val="tx1"/>
+                </a:solidFill>
+                <a:effectLst/>
+                <a:latin typeface="Batang" panose="02030600000101010101" pitchFamily="18" charset="-127"/>
+                <a:ea typeface="Batang" panose="02030600000101010101" pitchFamily="18" charset="-127"/>
+                <a:cs typeface="+mj-cs"/>
+              </a:defRPr>
+            </a:lvl1pPr>
+          </a:lstStyle>
+          <a:p>
+            <a:pPr algn="l"/>
+            <a:r>
+              <a:rPr lang="en-US" altLang="ko-KR" sz="2800" cap="none" dirty="0">
+                <a:solidFill>
+                  <a:schemeClr val="bg2">
+                    <a:lumMod val="25000"/>
+                  </a:schemeClr>
+                </a:solidFill>
+                <a:latin typeface="D2Coding" panose="020B0609020101020101" pitchFamily="49" charset="-127"/>
+                <a:ea typeface="D2Coding" panose="020B0609020101020101" pitchFamily="49" charset="-127"/>
+                <a:cs typeface="Segoe UI Light" panose="020B0502040204020203" pitchFamily="34" charset="0"/>
+              </a:rPr>
+              <a:t>Generative Model</a:t>
+            </a:r>
+          </a:p>
+        </p:txBody>
+      </p:sp>
+      <p:sp>
+        <p:nvSpPr>
+          <p:cNvPr id="51" name="슬라이드 번호 개체 틀 3">
+            <a:extLst>
+              <a:ext uri="{FF2B5EF4-FFF2-40B4-BE49-F238E27FC236}">
+                <a16:creationId xmlns:a16="http://schemas.microsoft.com/office/drawing/2014/main" id="{5CC58470-FB43-A1C0-49AE-98C85F60E9CA}"/>
+              </a:ext>
+            </a:extLst>
+          </p:cNvPr>
+          <p:cNvSpPr txBox="1">
+            <a:spLocks/>
+          </p:cNvSpPr>
+          <p:nvPr/>
+        </p:nvSpPr>
+        <p:spPr>
+          <a:xfrm>
+            <a:off x="11180761" y="299420"/>
+            <a:ext cx="753545" cy="365125"/>
+          </a:xfrm>
+          <a:prstGeom prst="rect">
+            <a:avLst/>
+          </a:prstGeom>
+        </p:spPr>
+        <p:txBody>
+          <a:bodyPr vert="horz" lIns="91440" tIns="45720" rIns="91440" bIns="45720" rtlCol="0" anchor="ctr"/>
+          <a:lstStyle>
+            <a:defPPr rtl="0">
+              <a:defRPr lang="ko-KR"/>
+            </a:defPPr>
+            <a:lvl1pPr marL="0" algn="r" defTabSz="914400" rtl="0" eaLnBrk="1" latinLnBrk="0" hangingPunct="1">
+              <a:defRPr sz="1200" kern="1200" baseline="0">
+                <a:solidFill>
+                  <a:schemeClr val="tx1">
+                    <a:lumMod val="65000"/>
+                    <a:lumOff val="35000"/>
+                  </a:schemeClr>
+                </a:solidFill>
+                <a:latin typeface="맑은 고딕" panose="020B0503020000020004" pitchFamily="50" charset="-127"/>
+                <a:ea typeface="맑은 고딕" panose="020B0503020000020004" pitchFamily="50" charset="-127"/>
+                <a:cs typeface="+mn-cs"/>
+              </a:defRPr>
+            </a:lvl1pPr>
+            <a:lvl2pPr marL="457200" algn="l" defTabSz="914400" rtl="0" eaLnBrk="1" latinLnBrk="0" hangingPunct="1">
+              <a:defRPr sz="1800" kern="1200">
+                <a:solidFill>
+                  <a:schemeClr val="tx1"/>
+                </a:solidFill>
+                <a:latin typeface="+mn-lt"/>
+                <a:ea typeface="+mn-ea"/>
+                <a:cs typeface="+mn-cs"/>
+              </a:defRPr>
+            </a:lvl2pPr>
+            <a:lvl3pPr marL="914400" algn="l" defTabSz="914400" rtl="0" eaLnBrk="1" latinLnBrk="0" hangingPunct="1">
+              <a:defRPr sz="1800" kern="1200">
+                <a:solidFill>
+                  <a:schemeClr val="tx1"/>
+                </a:solidFill>
+                <a:latin typeface="+mn-lt"/>
+                <a:ea typeface="+mn-ea"/>
+                <a:cs typeface="+mn-cs"/>
+              </a:defRPr>
+            </a:lvl3pPr>
+            <a:lvl4pPr marL="1371600" algn="l" defTabSz="914400" rtl="0" eaLnBrk="1" latinLnBrk="0" hangingPunct="1">
+              <a:defRPr sz="1800" kern="1200">
+                <a:solidFill>
+                  <a:schemeClr val="tx1"/>
+                </a:solidFill>
+                <a:latin typeface="+mn-lt"/>
+                <a:ea typeface="+mn-ea"/>
+                <a:cs typeface="+mn-cs"/>
+              </a:defRPr>
+            </a:lvl4pPr>
+            <a:lvl5pPr marL="1828800" algn="l" defTabSz="914400" rtl="0" eaLnBrk="1" latinLnBrk="0" hangingPunct="1">
+              <a:defRPr sz="1800" kern="1200">
+                <a:solidFill>
+                  <a:schemeClr val="tx1"/>
+                </a:solidFill>
+                <a:latin typeface="+mn-lt"/>
+                <a:ea typeface="+mn-ea"/>
+                <a:cs typeface="+mn-cs"/>
+              </a:defRPr>
+            </a:lvl5pPr>
+            <a:lvl6pPr marL="2286000" algn="l" defTabSz="914400" rtl="0" eaLnBrk="1" latinLnBrk="0" hangingPunct="1">
+              <a:defRPr sz="1800" kern="1200">
+                <a:solidFill>
+                  <a:schemeClr val="tx1"/>
+                </a:solidFill>
+                <a:latin typeface="+mn-lt"/>
+                <a:ea typeface="+mn-ea"/>
+                <a:cs typeface="+mn-cs"/>
+              </a:defRPr>
+            </a:lvl6pPr>
+            <a:lvl7pPr marL="2743200" algn="l" defTabSz="914400" rtl="0" eaLnBrk="1" latinLnBrk="0" hangingPunct="1">
+              <a:defRPr sz="1800" kern="1200">
+                <a:solidFill>
+                  <a:schemeClr val="tx1"/>
+                </a:solidFill>
+                <a:latin typeface="+mn-lt"/>
+                <a:ea typeface="+mn-ea"/>
+                <a:cs typeface="+mn-cs"/>
+              </a:defRPr>
+            </a:lvl7pPr>
+            <a:lvl8pPr marL="3200400" algn="l" defTabSz="914400" rtl="0" eaLnBrk="1" latinLnBrk="0" hangingPunct="1">
+              <a:defRPr sz="1800" kern="1200">
+                <a:solidFill>
+                  <a:schemeClr val="tx1"/>
+                </a:solidFill>
+                <a:latin typeface="+mn-lt"/>
+                <a:ea typeface="+mn-ea"/>
+                <a:cs typeface="+mn-cs"/>
+              </a:defRPr>
+            </a:lvl8pPr>
+            <a:lvl9pPr marL="3657600" algn="l" defTabSz="914400" rtl="0" eaLnBrk="1" latinLnBrk="0" hangingPunct="1">
+              <a:defRPr sz="1800" kern="1200">
+                <a:solidFill>
+                  <a:schemeClr val="tx1"/>
+                </a:solidFill>
+                <a:latin typeface="+mn-lt"/>
+                <a:ea typeface="+mn-ea"/>
+                <a:cs typeface="+mn-cs"/>
+              </a:defRPr>
+            </a:lvl9pPr>
+          </a:lstStyle>
+          <a:p>
+            <a:fld id="{D57F1E4F-1CFF-5643-939E-217C01CDF565}" type="slidenum">
+              <a:rPr lang="en-US" b="1" smtClean="0">
+                <a:latin typeface="Segoe UI Emoji" panose="020B0502040204020203" pitchFamily="34" charset="0"/>
+                <a:ea typeface="Segoe UI Emoji" panose="020B0502040204020203" pitchFamily="34" charset="0"/>
+              </a:rPr>
+              <a:pPr/>
+              <a:t>27</a:t>
+            </a:fld>
+            <a:endParaRPr lang="en-US" b="1" dirty="0">
+              <a:latin typeface="Segoe UI Emoji" panose="020B0502040204020203" pitchFamily="34" charset="0"/>
+              <a:ea typeface="Segoe UI Emoji" panose="020B0502040204020203" pitchFamily="34" charset="0"/>
+            </a:endParaRPr>
+          </a:p>
+        </p:txBody>
+      </p:sp>
+      <p:sp>
+        <p:nvSpPr>
+          <p:cNvPr id="17" name="TextBox 16">
+            <a:extLst>
+              <a:ext uri="{FF2B5EF4-FFF2-40B4-BE49-F238E27FC236}">
+                <a16:creationId xmlns:a16="http://schemas.microsoft.com/office/drawing/2014/main" id="{8D2B91BB-6357-DEFF-8EBD-2490C23A5D83}"/>
+              </a:ext>
+            </a:extLst>
+          </p:cNvPr>
+          <p:cNvSpPr txBox="1"/>
+          <p:nvPr/>
+        </p:nvSpPr>
+        <p:spPr>
+          <a:xfrm>
+            <a:off x="712267" y="1248422"/>
+            <a:ext cx="11108258" cy="5155899"/>
+          </a:xfrm>
+          <a:prstGeom prst="rect">
+            <a:avLst/>
+          </a:prstGeom>
+          <a:noFill/>
+        </p:spPr>
+        <p:txBody>
+          <a:bodyPr wrap="square">
+            <a:spAutoFit/>
+          </a:bodyPr>
+          <a:lstStyle/>
+          <a:p>
+            <a:pPr marL="285750" indent="-285750">
+              <a:lnSpc>
+                <a:spcPct val="150000"/>
+              </a:lnSpc>
+              <a:buFont typeface="Wingdings" panose="05000000000000000000" pitchFamily="2" charset="2"/>
+              <a:buChar char="v"/>
+            </a:pPr>
+            <a:r>
+              <a:rPr lang="en-US" altLang="ko-KR" sz="1600" b="1" dirty="0">
+                <a:latin typeface="D2Coding" panose="020B0609020101020101" pitchFamily="49" charset="-127"/>
+                <a:ea typeface="D2Coding" panose="020B0609020101020101" pitchFamily="49" charset="-127"/>
+              </a:rPr>
+              <a:t>"map the description back into pixels“</a:t>
+            </a:r>
+          </a:p>
+          <a:p>
+            <a:pPr marL="742950" lvl="1" indent="-285750">
+              <a:lnSpc>
+                <a:spcPct val="150000"/>
+              </a:lnSpc>
+              <a:buFont typeface="Wingdings" panose="05000000000000000000" pitchFamily="2" charset="2"/>
+              <a:buChar char="v"/>
+            </a:pPr>
+            <a:r>
+              <a:rPr lang="en-US" altLang="ko-KR" sz="1600" dirty="0">
+                <a:latin typeface="D2Coding" panose="020B0609020101020101" pitchFamily="49" charset="-127"/>
+                <a:ea typeface="D2Coding" panose="020B0609020101020101" pitchFamily="49" charset="-127"/>
+              </a:rPr>
+              <a:t>"10</a:t>
+            </a:r>
+            <a:r>
+              <a:rPr lang="ko-KR" altLang="en-US" sz="1600" dirty="0">
+                <a:latin typeface="D2Coding" panose="020B0609020101020101" pitchFamily="49" charset="-127"/>
+                <a:ea typeface="D2Coding" panose="020B0609020101020101" pitchFamily="49" charset="-127"/>
+              </a:rPr>
+              <a:t>개 정도의 설명만으로도 그 사람의 얼굴을 머릿속에서 만들어낼 수 있다</a:t>
+            </a:r>
+            <a:r>
+              <a:rPr lang="en-US" altLang="ko-KR" sz="1600" dirty="0">
+                <a:latin typeface="D2Coding" panose="020B0609020101020101" pitchFamily="49" charset="-127"/>
+                <a:ea typeface="D2Coding" panose="020B0609020101020101" pitchFamily="49" charset="-127"/>
+              </a:rPr>
+              <a:t>."</a:t>
+            </a:r>
+          </a:p>
+          <a:p>
+            <a:pPr marL="742950" lvl="1" indent="-285750">
+              <a:lnSpc>
+                <a:spcPct val="150000"/>
+              </a:lnSpc>
+              <a:buFont typeface="Wingdings" panose="05000000000000000000" pitchFamily="2" charset="2"/>
+              <a:buChar char="v"/>
+            </a:pPr>
+            <a:r>
+              <a:rPr lang="ko-KR" altLang="en-US" sz="1600" dirty="0">
+                <a:latin typeface="D2Coding" panose="020B0609020101020101" pitchFamily="49" charset="-127"/>
+                <a:ea typeface="D2Coding" panose="020B0609020101020101" pitchFamily="49" charset="-127"/>
+              </a:rPr>
+              <a:t>사람은</a:t>
+            </a:r>
+            <a:r>
+              <a:rPr lang="en-US" altLang="ko-KR" sz="1600" dirty="0">
+                <a:latin typeface="D2Coding" panose="020B0609020101020101" pitchFamily="49" charset="-127"/>
+                <a:ea typeface="D2Coding" panose="020B0609020101020101" pitchFamily="49" charset="-127"/>
+              </a:rPr>
+              <a:t> "</a:t>
+            </a:r>
+            <a:r>
+              <a:rPr lang="ko-KR" altLang="en-US" sz="1600" dirty="0">
+                <a:latin typeface="D2Coding" panose="020B0609020101020101" pitchFamily="49" charset="-127"/>
+                <a:ea typeface="D2Coding" panose="020B0609020101020101" pitchFamily="49" charset="-127"/>
+              </a:rPr>
+              <a:t>금발이고</a:t>
+            </a:r>
+            <a:r>
+              <a:rPr lang="en-US" altLang="ko-KR" sz="1600" dirty="0">
+                <a:latin typeface="D2Coding" panose="020B0609020101020101" pitchFamily="49" charset="-127"/>
+                <a:ea typeface="D2Coding" panose="020B0609020101020101" pitchFamily="49" charset="-127"/>
+              </a:rPr>
+              <a:t>, </a:t>
+            </a:r>
+            <a:r>
+              <a:rPr lang="ko-KR" altLang="en-US" sz="1600" dirty="0">
+                <a:latin typeface="D2Coding" panose="020B0609020101020101" pitchFamily="49" charset="-127"/>
+                <a:ea typeface="D2Coding" panose="020B0609020101020101" pitchFamily="49" charset="-127"/>
+              </a:rPr>
+              <a:t>안경을 쓰고</a:t>
+            </a:r>
+            <a:r>
+              <a:rPr lang="en-US" altLang="ko-KR" sz="1600" dirty="0">
+                <a:latin typeface="D2Coding" panose="020B0609020101020101" pitchFamily="49" charset="-127"/>
+                <a:ea typeface="D2Coding" panose="020B0609020101020101" pitchFamily="49" charset="-127"/>
+              </a:rPr>
+              <a:t>, </a:t>
+            </a:r>
+            <a:r>
+              <a:rPr lang="ko-KR" altLang="en-US" sz="1600" dirty="0">
+                <a:latin typeface="D2Coding" panose="020B0609020101020101" pitchFamily="49" charset="-127"/>
+                <a:ea typeface="D2Coding" panose="020B0609020101020101" pitchFamily="49" charset="-127"/>
+              </a:rPr>
+              <a:t>얼굴이 갸름하고</a:t>
+            </a:r>
+            <a:r>
+              <a:rPr lang="en-US" altLang="ko-KR" sz="1600" dirty="0">
+                <a:latin typeface="D2Coding" panose="020B0609020101020101" pitchFamily="49" charset="-127"/>
+                <a:ea typeface="D2Coding" panose="020B0609020101020101" pitchFamily="49" charset="-127"/>
+              </a:rPr>
+              <a:t>, </a:t>
+            </a:r>
+            <a:r>
+              <a:rPr lang="ko-KR" altLang="en-US" sz="1600" dirty="0">
+                <a:latin typeface="D2Coding" panose="020B0609020101020101" pitchFamily="49" charset="-127"/>
+                <a:ea typeface="D2Coding" panose="020B0609020101020101" pitchFamily="49" charset="-127"/>
+              </a:rPr>
+              <a:t>눈이 크고</a:t>
+            </a:r>
+            <a:r>
+              <a:rPr lang="en-US" altLang="ko-KR" sz="1600" dirty="0">
+                <a:latin typeface="D2Coding" panose="020B0609020101020101" pitchFamily="49" charset="-127"/>
+                <a:ea typeface="D2Coding" panose="020B0609020101020101" pitchFamily="49" charset="-127"/>
+              </a:rPr>
+              <a:t>, </a:t>
+            </a:r>
+            <a:r>
+              <a:rPr lang="ko-KR" altLang="en-US" sz="1600" dirty="0">
+                <a:latin typeface="D2Coding" panose="020B0609020101020101" pitchFamily="49" charset="-127"/>
+                <a:ea typeface="D2Coding" panose="020B0609020101020101" pitchFamily="49" charset="-127"/>
+              </a:rPr>
+              <a:t>웃고 있다</a:t>
+            </a:r>
+            <a:r>
+              <a:rPr lang="en-US" altLang="ko-KR" sz="1600" dirty="0">
+                <a:latin typeface="D2Coding" panose="020B0609020101020101" pitchFamily="49" charset="-127"/>
+                <a:ea typeface="D2Coding" panose="020B0609020101020101" pitchFamily="49" charset="-127"/>
+              </a:rPr>
+              <a:t>.“ </a:t>
+            </a:r>
+            <a:r>
+              <a:rPr lang="ko-KR" altLang="en-US" sz="1600" dirty="0">
+                <a:latin typeface="D2Coding" panose="020B0609020101020101" pitchFamily="49" charset="-127"/>
+                <a:ea typeface="D2Coding" panose="020B0609020101020101" pitchFamily="49" charset="-127"/>
+              </a:rPr>
+              <a:t>라고 들으면 머릿속으로 대략적인 얼굴을 상상할 수 있으며</a:t>
+            </a:r>
+            <a:r>
+              <a:rPr lang="en-US" altLang="ko-KR" sz="1600" dirty="0">
+                <a:latin typeface="D2Coding" panose="020B0609020101020101" pitchFamily="49" charset="-127"/>
+                <a:ea typeface="D2Coding" panose="020B0609020101020101" pitchFamily="49" charset="-127"/>
+              </a:rPr>
+              <a:t> </a:t>
+            </a:r>
+            <a:r>
+              <a:rPr lang="ko-KR" altLang="en-US" sz="1600" dirty="0">
+                <a:latin typeface="D2Coding" panose="020B0609020101020101" pitchFamily="49" charset="-127"/>
+                <a:ea typeface="D2Coding" panose="020B0609020101020101" pitchFamily="49" charset="-127"/>
+              </a:rPr>
+              <a:t>이를 </a:t>
+            </a:r>
+            <a:r>
+              <a:rPr lang="en-US" altLang="ko-KR" sz="1600" dirty="0">
+                <a:latin typeface="D2Coding" panose="020B0609020101020101" pitchFamily="49" charset="-127"/>
+                <a:ea typeface="D2Coding" panose="020B0609020101020101" pitchFamily="49" charset="-127"/>
+              </a:rPr>
+              <a:t>AI </a:t>
+            </a:r>
+            <a:r>
+              <a:rPr lang="ko-KR" altLang="en-US" sz="1600" dirty="0">
+                <a:latin typeface="D2Coding" panose="020B0609020101020101" pitchFamily="49" charset="-127"/>
+                <a:ea typeface="D2Coding" panose="020B0609020101020101" pitchFamily="49" charset="-127"/>
+              </a:rPr>
+              <a:t>관점에서 보면</a:t>
+            </a:r>
+            <a:endParaRPr lang="en-US" altLang="ko-KR" sz="1600" dirty="0">
+              <a:latin typeface="D2Coding" panose="020B0609020101020101" pitchFamily="49" charset="-127"/>
+              <a:ea typeface="D2Coding" panose="020B0609020101020101" pitchFamily="49" charset="-127"/>
+            </a:endParaRPr>
+          </a:p>
+          <a:p>
+            <a:pPr marL="742950" lvl="1" indent="-285750">
+              <a:lnSpc>
+                <a:spcPct val="150000"/>
+              </a:lnSpc>
+              <a:buFont typeface="Wingdings" panose="05000000000000000000" pitchFamily="2" charset="2"/>
+              <a:buChar char="v"/>
+            </a:pPr>
+            <a:endParaRPr lang="ko-KR" altLang="en-US" sz="700" dirty="0">
+              <a:latin typeface="D2Coding" panose="020B0609020101020101" pitchFamily="49" charset="-127"/>
+              <a:ea typeface="D2Coding" panose="020B0609020101020101" pitchFamily="49" charset="-127"/>
+            </a:endParaRPr>
+          </a:p>
+          <a:p>
+            <a:pPr algn="ctr" rtl="0">
+              <a:lnSpc>
+                <a:spcPct val="150000"/>
+              </a:lnSpc>
+            </a:pPr>
+            <a:r>
+              <a:rPr lang="ko-KR" altLang="en-US" sz="1600" dirty="0">
+                <a:solidFill>
+                  <a:schemeClr val="bg1"/>
+                </a:solidFill>
+                <a:latin typeface="D2Coding" panose="020B0609020101020101" pitchFamily="49" charset="-127"/>
+                <a:ea typeface="D2Coding" panose="020B0609020101020101" pitchFamily="49" charset="-127"/>
+              </a:rPr>
+              <a:t>특징</a:t>
+            </a:r>
+          </a:p>
+          <a:p>
+            <a:pPr algn="ctr" rtl="0">
+              <a:lnSpc>
+                <a:spcPct val="150000"/>
+              </a:lnSpc>
+            </a:pPr>
+            <a:r>
+              <a:rPr lang="ko-KR" altLang="en-US" sz="1600" dirty="0">
+                <a:solidFill>
+                  <a:schemeClr val="bg1"/>
+                </a:solidFill>
+                <a:latin typeface="D2Coding" panose="020B0609020101020101" pitchFamily="49" charset="-127"/>
+                <a:ea typeface="D2Coding" panose="020B0609020101020101" pitchFamily="49" charset="-127"/>
+              </a:rPr>
+              <a:t> ↓</a:t>
+            </a:r>
+          </a:p>
+          <a:p>
+            <a:pPr algn="ctr" rtl="0">
+              <a:lnSpc>
+                <a:spcPct val="150000"/>
+              </a:lnSpc>
+            </a:pPr>
+            <a:r>
+              <a:rPr lang="en-US" altLang="ko-KR" sz="1600" dirty="0">
+                <a:solidFill>
+                  <a:schemeClr val="bg1"/>
+                </a:solidFill>
+                <a:latin typeface="D2Coding" panose="020B0609020101020101" pitchFamily="49" charset="-127"/>
+                <a:ea typeface="D2Coding" panose="020B0609020101020101" pitchFamily="49" charset="-127"/>
+              </a:rPr>
+              <a:t>[</a:t>
+            </a:r>
+            <a:r>
+              <a:rPr lang="ko-KR" altLang="en-US" sz="1600" dirty="0">
+                <a:solidFill>
+                  <a:schemeClr val="bg1"/>
+                </a:solidFill>
+                <a:latin typeface="D2Coding" panose="020B0609020101020101" pitchFamily="49" charset="-127"/>
+                <a:ea typeface="D2Coding" panose="020B0609020101020101" pitchFamily="49" charset="-127"/>
+              </a:rPr>
+              <a:t>금발</a:t>
+            </a:r>
+            <a:r>
+              <a:rPr lang="en-US" altLang="ko-KR" sz="1600" dirty="0">
+                <a:solidFill>
+                  <a:schemeClr val="bg1"/>
+                </a:solidFill>
+                <a:latin typeface="D2Coding" panose="020B0609020101020101" pitchFamily="49" charset="-127"/>
+                <a:ea typeface="D2Coding" panose="020B0609020101020101" pitchFamily="49" charset="-127"/>
+              </a:rPr>
+              <a:t>, </a:t>
+            </a:r>
+            <a:r>
+              <a:rPr lang="ko-KR" altLang="en-US" sz="1600" dirty="0">
+                <a:solidFill>
+                  <a:schemeClr val="bg1"/>
+                </a:solidFill>
+                <a:latin typeface="D2Coding" panose="020B0609020101020101" pitchFamily="49" charset="-127"/>
+                <a:ea typeface="D2Coding" panose="020B0609020101020101" pitchFamily="49" charset="-127"/>
+              </a:rPr>
+              <a:t>안경</a:t>
+            </a:r>
+            <a:r>
+              <a:rPr lang="en-US" altLang="ko-KR" sz="1600" dirty="0">
+                <a:solidFill>
+                  <a:schemeClr val="bg1"/>
+                </a:solidFill>
+                <a:latin typeface="D2Coding" panose="020B0609020101020101" pitchFamily="49" charset="-127"/>
+                <a:ea typeface="D2Coding" panose="020B0609020101020101" pitchFamily="49" charset="-127"/>
+              </a:rPr>
+              <a:t>, </a:t>
+            </a:r>
+            <a:r>
+              <a:rPr lang="ko-KR" altLang="en-US" sz="1600" dirty="0">
+                <a:solidFill>
+                  <a:schemeClr val="bg1"/>
+                </a:solidFill>
+                <a:latin typeface="D2Coding" panose="020B0609020101020101" pitchFamily="49" charset="-127"/>
+                <a:ea typeface="D2Coding" panose="020B0609020101020101" pitchFamily="49" charset="-127"/>
+              </a:rPr>
+              <a:t>갸름한 얼굴</a:t>
+            </a:r>
+            <a:r>
+              <a:rPr lang="en-US" altLang="ko-KR" sz="1600" dirty="0">
+                <a:solidFill>
+                  <a:schemeClr val="bg1"/>
+                </a:solidFill>
+                <a:latin typeface="D2Coding" panose="020B0609020101020101" pitchFamily="49" charset="-127"/>
+                <a:ea typeface="D2Coding" panose="020B0609020101020101" pitchFamily="49" charset="-127"/>
+              </a:rPr>
+              <a:t>, </a:t>
+            </a:r>
+            <a:r>
+              <a:rPr lang="ko-KR" altLang="en-US" sz="1600" dirty="0">
+                <a:solidFill>
+                  <a:schemeClr val="bg1"/>
+                </a:solidFill>
+                <a:latin typeface="D2Coding" panose="020B0609020101020101" pitchFamily="49" charset="-127"/>
+                <a:ea typeface="D2Coding" panose="020B0609020101020101" pitchFamily="49" charset="-127"/>
+              </a:rPr>
+              <a:t>큰 눈</a:t>
+            </a:r>
+            <a:r>
+              <a:rPr lang="en-US" altLang="ko-KR" sz="1600" dirty="0">
+                <a:solidFill>
+                  <a:schemeClr val="bg1"/>
+                </a:solidFill>
+                <a:latin typeface="D2Coding" panose="020B0609020101020101" pitchFamily="49" charset="-127"/>
+                <a:ea typeface="D2Coding" panose="020B0609020101020101" pitchFamily="49" charset="-127"/>
+              </a:rPr>
+              <a:t>, </a:t>
+            </a:r>
+            <a:r>
+              <a:rPr lang="ko-KR" altLang="en-US" sz="1600" dirty="0">
+                <a:solidFill>
+                  <a:schemeClr val="bg1"/>
+                </a:solidFill>
+                <a:latin typeface="D2Coding" panose="020B0609020101020101" pitchFamily="49" charset="-127"/>
+                <a:ea typeface="D2Coding" panose="020B0609020101020101" pitchFamily="49" charset="-127"/>
+              </a:rPr>
+              <a:t>웃음</a:t>
+            </a:r>
+            <a:r>
+              <a:rPr lang="en-US" altLang="ko-KR" sz="1600" dirty="0">
+                <a:solidFill>
+                  <a:schemeClr val="bg1"/>
+                </a:solidFill>
+                <a:latin typeface="D2Coding" panose="020B0609020101020101" pitchFamily="49" charset="-127"/>
+                <a:ea typeface="D2Coding" panose="020B0609020101020101" pitchFamily="49" charset="-127"/>
+              </a:rPr>
+              <a:t>]</a:t>
+            </a:r>
+          </a:p>
+          <a:p>
+            <a:pPr algn="ctr" rtl="0">
+              <a:lnSpc>
+                <a:spcPct val="150000"/>
+              </a:lnSpc>
+            </a:pPr>
+            <a:r>
+              <a:rPr lang="en-US" altLang="ko-KR" sz="1600" dirty="0">
+                <a:solidFill>
+                  <a:schemeClr val="bg1"/>
+                </a:solidFill>
+                <a:latin typeface="D2Coding" panose="020B0609020101020101" pitchFamily="49" charset="-127"/>
+                <a:ea typeface="D2Coding" panose="020B0609020101020101" pitchFamily="49" charset="-127"/>
+              </a:rPr>
+              <a:t> ↓</a:t>
+            </a:r>
+          </a:p>
+          <a:p>
+            <a:pPr algn="ctr" rtl="0">
+              <a:lnSpc>
+                <a:spcPct val="150000"/>
+              </a:lnSpc>
+            </a:pPr>
+            <a:r>
+              <a:rPr lang="en-US" altLang="ko-KR" sz="1600" dirty="0">
+                <a:solidFill>
+                  <a:schemeClr val="bg1"/>
+                </a:solidFill>
+                <a:latin typeface="D2Coding" panose="020B0609020101020101" pitchFamily="49" charset="-127"/>
+                <a:ea typeface="D2Coding" panose="020B0609020101020101" pitchFamily="49" charset="-127"/>
+              </a:rPr>
+              <a:t>Generative Model</a:t>
+            </a:r>
+          </a:p>
+          <a:p>
+            <a:pPr algn="ctr" rtl="0">
+              <a:lnSpc>
+                <a:spcPct val="150000"/>
+              </a:lnSpc>
+            </a:pPr>
+            <a:r>
+              <a:rPr lang="en-US" altLang="ko-KR" sz="1600" dirty="0">
+                <a:solidFill>
+                  <a:schemeClr val="bg1"/>
+                </a:solidFill>
+                <a:latin typeface="D2Coding" panose="020B0609020101020101" pitchFamily="49" charset="-127"/>
+                <a:ea typeface="D2Coding" panose="020B0609020101020101" pitchFamily="49" charset="-127"/>
+              </a:rPr>
+              <a:t> ↓</a:t>
+            </a:r>
+          </a:p>
+          <a:p>
+            <a:pPr algn="ctr" rtl="0">
+              <a:lnSpc>
+                <a:spcPct val="150000"/>
+              </a:lnSpc>
+            </a:pPr>
+            <a:r>
+              <a:rPr lang="ko-KR" altLang="en-US" sz="1600" dirty="0">
+                <a:solidFill>
+                  <a:schemeClr val="bg1"/>
+                </a:solidFill>
+                <a:latin typeface="D2Coding" panose="020B0609020101020101" pitchFamily="49" charset="-127"/>
+                <a:ea typeface="D2Coding" panose="020B0609020101020101" pitchFamily="49" charset="-127"/>
+              </a:rPr>
+              <a:t>이미지 생성</a:t>
+            </a:r>
+          </a:p>
+          <a:p>
+            <a:pPr marL="285750" indent="-285750">
+              <a:lnSpc>
+                <a:spcPct val="150000"/>
+              </a:lnSpc>
+              <a:buFont typeface="Wingdings" panose="05000000000000000000" pitchFamily="2" charset="2"/>
+              <a:buChar char="v"/>
+            </a:pPr>
+            <a:endParaRPr lang="en-US" altLang="ko-KR" sz="600" dirty="0">
+              <a:latin typeface="D2Coding" panose="020B0609020101020101" pitchFamily="49" charset="-127"/>
+              <a:ea typeface="D2Coding" panose="020B0609020101020101" pitchFamily="49" charset="-127"/>
+            </a:endParaRPr>
+          </a:p>
+          <a:p>
+            <a:pPr marL="285750" indent="-285750">
+              <a:lnSpc>
+                <a:spcPct val="150000"/>
+              </a:lnSpc>
+              <a:buFont typeface="Wingdings" panose="05000000000000000000" pitchFamily="2" charset="2"/>
+              <a:buChar char="v"/>
+            </a:pPr>
+            <a:r>
+              <a:rPr lang="ko-KR" altLang="en-US" sz="1600" dirty="0">
+                <a:latin typeface="D2Coding" panose="020B0609020101020101" pitchFamily="49" charset="-127"/>
+                <a:ea typeface="D2Coding" panose="020B0609020101020101" pitchFamily="49" charset="-127"/>
+              </a:rPr>
+              <a:t>즉</a:t>
+            </a:r>
+            <a:r>
+              <a:rPr lang="en-US" altLang="ko-KR" sz="1600" dirty="0">
+                <a:latin typeface="D2Coding" panose="020B0609020101020101" pitchFamily="49" charset="-127"/>
+                <a:ea typeface="D2Coding" panose="020B0609020101020101" pitchFamily="49" charset="-127"/>
+              </a:rPr>
+              <a:t>, </a:t>
+            </a:r>
+            <a:r>
+              <a:rPr lang="en-US" altLang="ko-KR" sz="1600" b="1" dirty="0">
+                <a:latin typeface="D2Coding" panose="020B0609020101020101" pitchFamily="49" charset="-127"/>
+                <a:ea typeface="D2Coding" panose="020B0609020101020101" pitchFamily="49" charset="-127"/>
+              </a:rPr>
+              <a:t>Representation Learning + Generative Modeling</a:t>
+            </a:r>
+            <a:r>
+              <a:rPr lang="ko-KR" altLang="en-US" sz="1600" dirty="0">
+                <a:latin typeface="D2Coding" panose="020B0609020101020101" pitchFamily="49" charset="-127"/>
+                <a:ea typeface="D2Coding" panose="020B0609020101020101" pitchFamily="49" charset="-127"/>
+              </a:rPr>
+              <a:t>이 결합되면 </a:t>
+            </a:r>
+            <a:r>
+              <a:rPr lang="en-US" altLang="ko-KR" sz="1600" b="1" dirty="0">
+                <a:latin typeface="D2Coding" panose="020B0609020101020101" pitchFamily="49" charset="-127"/>
+                <a:ea typeface="D2Coding" panose="020B0609020101020101" pitchFamily="49" charset="-127"/>
+              </a:rPr>
+              <a:t>"</a:t>
+            </a:r>
+            <a:r>
+              <a:rPr lang="ko-KR" altLang="en-US" sz="1600" b="1" dirty="0">
+                <a:latin typeface="D2Coding" panose="020B0609020101020101" pitchFamily="49" charset="-127"/>
+                <a:ea typeface="D2Coding" panose="020B0609020101020101" pitchFamily="49" charset="-127"/>
+              </a:rPr>
+              <a:t>어떤 얼굴을 어떻게 표현할 것인가</a:t>
+            </a:r>
+            <a:r>
+              <a:rPr lang="en-US" altLang="ko-KR" sz="1600" b="1" dirty="0">
+                <a:latin typeface="D2Coding" panose="020B0609020101020101" pitchFamily="49" charset="-127"/>
+                <a:ea typeface="D2Coding" panose="020B0609020101020101" pitchFamily="49" charset="-127"/>
+              </a:rPr>
+              <a:t>?“ </a:t>
+            </a:r>
+            <a:r>
+              <a:rPr lang="ko-KR" altLang="en-US" sz="1600" dirty="0">
+                <a:latin typeface="D2Coding" panose="020B0609020101020101" pitchFamily="49" charset="-127"/>
+                <a:ea typeface="D2Coding" panose="020B0609020101020101" pitchFamily="49" charset="-127"/>
+              </a:rPr>
+              <a:t>뿐 아니라 </a:t>
+            </a:r>
+            <a:r>
+              <a:rPr lang="en-US" altLang="ko-KR" sz="1600" b="1" dirty="0">
+                <a:latin typeface="D2Coding" panose="020B0609020101020101" pitchFamily="49" charset="-127"/>
+                <a:ea typeface="D2Coding" panose="020B0609020101020101" pitchFamily="49" charset="-127"/>
+              </a:rPr>
+              <a:t>"</a:t>
+            </a:r>
+            <a:r>
+              <a:rPr lang="ko-KR" altLang="en-US" sz="1600" b="1" dirty="0">
+                <a:latin typeface="D2Coding" panose="020B0609020101020101" pitchFamily="49" charset="-127"/>
+                <a:ea typeface="D2Coding" panose="020B0609020101020101" pitchFamily="49" charset="-127"/>
+              </a:rPr>
+              <a:t>그 표현으로부터 새로운 얼굴을 어떻게 생성할 것인가</a:t>
+            </a:r>
+            <a:r>
+              <a:rPr lang="en-US" altLang="ko-KR" sz="1600" b="1" dirty="0">
+                <a:latin typeface="D2Coding" panose="020B0609020101020101" pitchFamily="49" charset="-127"/>
+                <a:ea typeface="D2Coding" panose="020B0609020101020101" pitchFamily="49" charset="-127"/>
+              </a:rPr>
+              <a:t>?"</a:t>
+            </a:r>
+            <a:r>
+              <a:rPr lang="ko-KR" altLang="en-US" sz="1600" dirty="0">
+                <a:latin typeface="D2Coding" panose="020B0609020101020101" pitchFamily="49" charset="-127"/>
+                <a:ea typeface="D2Coding" panose="020B0609020101020101" pitchFamily="49" charset="-127"/>
+              </a:rPr>
+              <a:t>까지 가능</a:t>
+            </a:r>
+            <a:endParaRPr lang="en-US" altLang="ko-KR" sz="1600" dirty="0">
+              <a:latin typeface="D2Coding" panose="020B0609020101020101" pitchFamily="49" charset="-127"/>
+              <a:ea typeface="D2Coding" panose="020B0609020101020101" pitchFamily="49" charset="-127"/>
+            </a:endParaRPr>
+          </a:p>
+        </p:txBody>
+      </p:sp>
+    </p:spTree>
+    <p:extLst>
+      <p:ext uri="{BB962C8B-B14F-4D97-AF65-F5344CB8AC3E}">
+        <p14:creationId xmlns:p14="http://schemas.microsoft.com/office/powerpoint/2010/main" val="3098047772"/>
+      </p:ext>
+    </p:extLst>
+  </p:cSld>
+  <p:clrMapOvr>
+    <a:masterClrMapping/>
+  </p:clrMapOvr>
+</p:sld>
+</file>
+
+<file path=ppt/slides/slide28.xml><?xml version="1.0" encoding="utf-8"?>
 <p:sld xmlns:a="http://schemas.openxmlformats.org/drawingml/2006/main" xmlns:r="http://schemas.openxmlformats.org/officeDocument/2006/relationships" xmlns:p="http://schemas.openxmlformats.org/presentationml/2006/main">
   <p:cSld>
     <p:spTree>
@@ -11493,7 +13700,7 @@
                 <a:ea typeface="D2Coding" panose="020B0609020101020101" pitchFamily="49" charset="-127"/>
                 <a:cs typeface="Segoe UI Light" panose="020B0502040204020203" pitchFamily="34" charset="0"/>
               </a:rPr>
-              <a:t>The Challenges of Generative Modeling</a:t>
+              <a:t>Manifold</a:t>
             </a:r>
           </a:p>
         </p:txBody>
@@ -11628,7 +13835,7 @@
                 <a:ea typeface="Segoe UI Emoji" panose="020B0502040204020203" pitchFamily="34" charset="0"/>
               </a:rPr>
               <a:pPr/>
-              <a:t>26</a:t>
+              <a:t>28</a:t>
             </a:fld>
             <a:endParaRPr lang="en-US" b="1" dirty="0">
               <a:latin typeface="Segoe UI Emoji" panose="020B0502040204020203" pitchFamily="34" charset="0"/>
@@ -11679,6 +13886,318 @@
           <a:lstStyle/>
           <a:p>
             <a:endParaRPr lang="ko-KR" altLang="en-US"/>
+          </a:p>
+        </p:txBody>
+      </p:sp>
+      <p:pic>
+        <p:nvPicPr>
+          <p:cNvPr id="7" name="그림 6">
+            <a:extLst>
+              <a:ext uri="{FF2B5EF4-FFF2-40B4-BE49-F238E27FC236}">
+                <a16:creationId xmlns:a16="http://schemas.microsoft.com/office/drawing/2014/main" id="{0B60824A-C873-712E-4676-9DE9D05001DC}"/>
+              </a:ext>
+            </a:extLst>
+          </p:cNvPr>
+          <p:cNvPicPr>
+            <a:picLocks noChangeAspect="1"/>
+          </p:cNvPicPr>
+          <p:nvPr/>
+        </p:nvPicPr>
+        <p:blipFill>
+          <a:blip r:embed="rId2"/>
+          <a:stretch>
+            <a:fillRect/>
+          </a:stretch>
+        </p:blipFill>
+        <p:spPr>
+          <a:xfrm>
+            <a:off x="609683" y="1298138"/>
+            <a:ext cx="4761858" cy="5015449"/>
+          </a:xfrm>
+          <a:prstGeom prst="rect">
+            <a:avLst/>
+          </a:prstGeom>
+        </p:spPr>
+      </p:pic>
+      <p:sp>
+        <p:nvSpPr>
+          <p:cNvPr id="9" name="TextBox 8">
+            <a:extLst>
+              <a:ext uri="{FF2B5EF4-FFF2-40B4-BE49-F238E27FC236}">
+                <a16:creationId xmlns:a16="http://schemas.microsoft.com/office/drawing/2014/main" id="{DF433541-8497-F540-6077-D092D2F0CC59}"/>
+              </a:ext>
+            </a:extLst>
+          </p:cNvPr>
+          <p:cNvSpPr txBox="1"/>
+          <p:nvPr/>
+        </p:nvSpPr>
+        <p:spPr>
+          <a:xfrm>
+            <a:off x="566176" y="6313588"/>
+            <a:ext cx="4801671" cy="338554"/>
+          </a:xfrm>
+          <a:prstGeom prst="rect">
+            <a:avLst/>
+          </a:prstGeom>
+          <a:noFill/>
+        </p:spPr>
+        <p:txBody>
+          <a:bodyPr wrap="square">
+            <a:spAutoFit/>
+          </a:bodyPr>
+          <a:lstStyle/>
+          <a:p>
+            <a:pPr>
+              <a:buNone/>
+            </a:pPr>
+            <a:r>
+              <a:rPr lang="en-US" altLang="ko-KR" sz="1600" dirty="0">
+                <a:latin typeface="D2Coding" panose="020B0609020101020101" pitchFamily="49" charset="-127"/>
+                <a:ea typeface="D2Coding" panose="020B0609020101020101" pitchFamily="49" charset="-127"/>
+              </a:rPr>
+              <a:t>lower-dimensional latent space (manifold)</a:t>
+            </a:r>
+          </a:p>
+        </p:txBody>
+      </p:sp>
+      <p:sp>
+        <p:nvSpPr>
+          <p:cNvPr id="11" name="TextBox 10">
+            <a:extLst>
+              <a:ext uri="{FF2B5EF4-FFF2-40B4-BE49-F238E27FC236}">
+                <a16:creationId xmlns:a16="http://schemas.microsoft.com/office/drawing/2014/main" id="{00F5FD42-1C8A-45BD-F930-8C7B16513321}"/>
+              </a:ext>
+            </a:extLst>
+          </p:cNvPr>
+          <p:cNvSpPr txBox="1"/>
+          <p:nvPr/>
+        </p:nvSpPr>
+        <p:spPr>
+          <a:xfrm>
+            <a:off x="5943600" y="1551645"/>
+            <a:ext cx="5386949" cy="3937296"/>
+          </a:xfrm>
+          <a:prstGeom prst="rect">
+            <a:avLst/>
+          </a:prstGeom>
+          <a:noFill/>
+          <a:ln>
+            <a:solidFill>
+              <a:srgbClr val="404040"/>
+            </a:solidFill>
+          </a:ln>
+        </p:spPr>
+        <p:txBody>
+          <a:bodyPr wrap="square">
+            <a:spAutoFit/>
+          </a:bodyPr>
+          <a:lstStyle/>
+          <a:p>
+            <a:pPr marL="285750" indent="-285750">
+              <a:lnSpc>
+                <a:spcPct val="150000"/>
+              </a:lnSpc>
+              <a:buFont typeface="Wingdings" panose="05000000000000000000" pitchFamily="2" charset="2"/>
+              <a:buChar char="v"/>
+            </a:pPr>
+            <a:r>
+              <a:rPr lang="en-US" altLang="ko-KR" sz="1400" dirty="0">
+                <a:latin typeface="D2Coding" panose="020B0609020101020101" pitchFamily="49" charset="-127"/>
+                <a:ea typeface="D2Coding" panose="020B0609020101020101" pitchFamily="49" charset="-127"/>
+              </a:rPr>
+              <a:t>The cube represents the extremely high-dimensional space of all images; representation learning tries to find the lower-dimensional latent subspace or manifold on which particular kinds of image lie (for example, the dog manifold)</a:t>
+            </a:r>
+          </a:p>
+          <a:p>
+            <a:pPr marL="285750" indent="-285750">
+              <a:lnSpc>
+                <a:spcPct val="150000"/>
+              </a:lnSpc>
+              <a:buFont typeface="Wingdings" panose="05000000000000000000" pitchFamily="2" charset="2"/>
+              <a:buChar char="v"/>
+            </a:pPr>
+            <a:endParaRPr lang="en-US" altLang="ko-KR" sz="1400" dirty="0">
+              <a:latin typeface="D2Coding" panose="020B0609020101020101" pitchFamily="49" charset="-127"/>
+              <a:ea typeface="D2Coding" panose="020B0609020101020101" pitchFamily="49" charset="-127"/>
+            </a:endParaRPr>
+          </a:p>
+          <a:p>
+            <a:pPr marL="285750" indent="-285750">
+              <a:lnSpc>
+                <a:spcPct val="150000"/>
+              </a:lnSpc>
+              <a:buFont typeface="Wingdings" panose="05000000000000000000" pitchFamily="2" charset="2"/>
+              <a:buChar char="v"/>
+            </a:pPr>
+            <a:r>
+              <a:rPr lang="ko-KR" altLang="en-US" sz="1400" dirty="0">
+                <a:latin typeface="D2Coding" panose="020B0609020101020101" pitchFamily="49" charset="-127"/>
+                <a:ea typeface="D2Coding" panose="020B0609020101020101" pitchFamily="49" charset="-127"/>
+              </a:rPr>
+              <a:t>정육면체는 모든 이미지의 극도로 고차원인 공간을 나타내며</a:t>
+            </a:r>
+            <a:r>
+              <a:rPr lang="en-US" altLang="ko-KR" sz="1400" dirty="0">
+                <a:latin typeface="D2Coding" panose="020B0609020101020101" pitchFamily="49" charset="-127"/>
+                <a:ea typeface="D2Coding" panose="020B0609020101020101" pitchFamily="49" charset="-127"/>
+              </a:rPr>
+              <a:t>, </a:t>
+            </a:r>
+            <a:r>
+              <a:rPr lang="ko-KR" altLang="en-US" sz="1400" dirty="0">
+                <a:latin typeface="D2Coding" panose="020B0609020101020101" pitchFamily="49" charset="-127"/>
+                <a:ea typeface="D2Coding" panose="020B0609020101020101" pitchFamily="49" charset="-127"/>
+              </a:rPr>
+              <a:t>표현 학습</a:t>
+            </a:r>
+            <a:r>
+              <a:rPr lang="en-US" altLang="ko-KR" sz="1400" dirty="0">
+                <a:latin typeface="D2Coding" panose="020B0609020101020101" pitchFamily="49" charset="-127"/>
+                <a:ea typeface="D2Coding" panose="020B0609020101020101" pitchFamily="49" charset="-127"/>
+              </a:rPr>
+              <a:t>(Representation </a:t>
+            </a:r>
+            <a:r>
+              <a:rPr lang="en-US" altLang="ko-KR" sz="1400" dirty="0" err="1">
+                <a:latin typeface="D2Coding" panose="020B0609020101020101" pitchFamily="49" charset="-127"/>
+                <a:ea typeface="D2Coding" panose="020B0609020101020101" pitchFamily="49" charset="-127"/>
+              </a:rPr>
+              <a:t>Leraning</a:t>
+            </a:r>
+            <a:r>
+              <a:rPr lang="en-US" altLang="ko-KR" sz="1400" dirty="0">
+                <a:latin typeface="D2Coding" panose="020B0609020101020101" pitchFamily="49" charset="-127"/>
+                <a:ea typeface="D2Coding" panose="020B0609020101020101" pitchFamily="49" charset="-127"/>
+              </a:rPr>
+              <a:t>)</a:t>
+            </a:r>
+            <a:r>
+              <a:rPr lang="ko-KR" altLang="en-US" sz="1400" dirty="0">
+                <a:latin typeface="D2Coding" panose="020B0609020101020101" pitchFamily="49" charset="-127"/>
+                <a:ea typeface="D2Coding" panose="020B0609020101020101" pitchFamily="49" charset="-127"/>
+              </a:rPr>
+              <a:t>은 특정 종류의 이미지</a:t>
+            </a:r>
+            <a:r>
+              <a:rPr lang="en-US" altLang="ko-KR" sz="1400" dirty="0">
+                <a:latin typeface="D2Coding" panose="020B0609020101020101" pitchFamily="49" charset="-127"/>
+                <a:ea typeface="D2Coding" panose="020B0609020101020101" pitchFamily="49" charset="-127"/>
+              </a:rPr>
+              <a:t>(</a:t>
+            </a:r>
+            <a:r>
+              <a:rPr lang="ko-KR" altLang="en-US" sz="1400" dirty="0">
+                <a:latin typeface="D2Coding" panose="020B0609020101020101" pitchFamily="49" charset="-127"/>
+                <a:ea typeface="D2Coding" panose="020B0609020101020101" pitchFamily="49" charset="-127"/>
+              </a:rPr>
+              <a:t>예</a:t>
+            </a:r>
+            <a:r>
+              <a:rPr lang="en-US" altLang="ko-KR" sz="1400" dirty="0">
+                <a:latin typeface="D2Coding" panose="020B0609020101020101" pitchFamily="49" charset="-127"/>
+                <a:ea typeface="D2Coding" panose="020B0609020101020101" pitchFamily="49" charset="-127"/>
+              </a:rPr>
+              <a:t>: </a:t>
+            </a:r>
+            <a:r>
+              <a:rPr lang="ko-KR" altLang="en-US" sz="1400" dirty="0">
+                <a:latin typeface="D2Coding" panose="020B0609020101020101" pitchFamily="49" charset="-127"/>
+                <a:ea typeface="D2Coding" panose="020B0609020101020101" pitchFamily="49" charset="-127"/>
+              </a:rPr>
+              <a:t>강아지 </a:t>
+            </a:r>
+            <a:r>
+              <a:rPr lang="ko-KR" altLang="en-US" sz="1400" dirty="0" err="1">
+                <a:latin typeface="D2Coding" panose="020B0609020101020101" pitchFamily="49" charset="-127"/>
+                <a:ea typeface="D2Coding" panose="020B0609020101020101" pitchFamily="49" charset="-127"/>
+              </a:rPr>
+              <a:t>매니폴드</a:t>
+            </a:r>
+            <a:r>
+              <a:rPr lang="en-US" altLang="ko-KR" sz="1400" dirty="0">
+                <a:latin typeface="D2Coding" panose="020B0609020101020101" pitchFamily="49" charset="-127"/>
+                <a:ea typeface="D2Coding" panose="020B0609020101020101" pitchFamily="49" charset="-127"/>
+              </a:rPr>
+              <a:t>)</a:t>
+            </a:r>
+            <a:r>
+              <a:rPr lang="ko-KR" altLang="en-US" sz="1400" dirty="0">
+                <a:latin typeface="D2Coding" panose="020B0609020101020101" pitchFamily="49" charset="-127"/>
+                <a:ea typeface="D2Coding" panose="020B0609020101020101" pitchFamily="49" charset="-127"/>
+              </a:rPr>
+              <a:t>가 위치하는 더 낮은 차원의 잠재 부분 공간 또는 </a:t>
+            </a:r>
+            <a:r>
+              <a:rPr lang="ko-KR" altLang="en-US" sz="1400" dirty="0" err="1">
+                <a:latin typeface="D2Coding" panose="020B0609020101020101" pitchFamily="49" charset="-127"/>
+                <a:ea typeface="D2Coding" panose="020B0609020101020101" pitchFamily="49" charset="-127"/>
+              </a:rPr>
+              <a:t>매니폴드</a:t>
+            </a:r>
+            <a:r>
+              <a:rPr lang="en-US" altLang="ko-KR" sz="1400" dirty="0">
+                <a:latin typeface="D2Coding" panose="020B0609020101020101" pitchFamily="49" charset="-127"/>
+                <a:ea typeface="D2Coding" panose="020B0609020101020101" pitchFamily="49" charset="-127"/>
+              </a:rPr>
+              <a:t>(manifold)</a:t>
+            </a:r>
+            <a:r>
+              <a:rPr lang="ko-KR" altLang="en-US" sz="1400" dirty="0">
+                <a:latin typeface="D2Coding" panose="020B0609020101020101" pitchFamily="49" charset="-127"/>
+                <a:ea typeface="D2Coding" panose="020B0609020101020101" pitchFamily="49" charset="-127"/>
+              </a:rPr>
+              <a:t>를 탐색</a:t>
+            </a:r>
+            <a:endParaRPr lang="en-US" altLang="ko-KR" sz="1400" dirty="0">
+              <a:latin typeface="D2Coding" panose="020B0609020101020101" pitchFamily="49" charset="-127"/>
+              <a:ea typeface="D2Coding" panose="020B0609020101020101" pitchFamily="49" charset="-127"/>
+            </a:endParaRPr>
+          </a:p>
+          <a:p>
+            <a:pPr marL="285750" indent="-285750">
+              <a:lnSpc>
+                <a:spcPct val="150000"/>
+              </a:lnSpc>
+              <a:buFont typeface="Wingdings" panose="05000000000000000000" pitchFamily="2" charset="2"/>
+              <a:buChar char="v"/>
+            </a:pPr>
+            <a:endParaRPr lang="en-US" altLang="ko-KR" sz="1400" dirty="0">
+              <a:latin typeface="D2Coding" panose="020B0609020101020101" pitchFamily="49" charset="-127"/>
+              <a:ea typeface="D2Coding" panose="020B0609020101020101" pitchFamily="49" charset="-127"/>
+            </a:endParaRPr>
+          </a:p>
+          <a:p>
+            <a:pPr>
+              <a:lnSpc>
+                <a:spcPct val="150000"/>
+              </a:lnSpc>
+            </a:pPr>
+            <a:r>
+              <a:rPr lang="en-US" altLang="ko-KR" sz="1400" dirty="0">
+                <a:latin typeface="D2Coding" panose="020B0609020101020101" pitchFamily="49" charset="-127"/>
+                <a:ea typeface="D2Coding" panose="020B0609020101020101" pitchFamily="49" charset="-127"/>
+                <a:sym typeface="Wingdings" panose="05000000000000000000" pitchFamily="2" charset="2"/>
+              </a:rPr>
+              <a:t>	 </a:t>
+            </a:r>
+            <a:r>
+              <a:rPr lang="en-US" altLang="ko-KR" sz="1400" dirty="0">
+                <a:latin typeface="D2Coding" panose="020B0609020101020101" pitchFamily="49" charset="-127"/>
+                <a:ea typeface="D2Coding" panose="020B0609020101020101" pitchFamily="49" charset="-127"/>
+              </a:rPr>
+              <a:t>Deep Learning architecture</a:t>
+            </a:r>
+            <a:r>
+              <a:rPr lang="ko-KR" altLang="en-US" sz="1400" dirty="0">
+                <a:latin typeface="D2Coding" panose="020B0609020101020101" pitchFamily="49" charset="-127"/>
+                <a:ea typeface="D2Coding" panose="020B0609020101020101" pitchFamily="49" charset="-127"/>
+              </a:rPr>
+              <a:t>의 학습 핵심</a:t>
+            </a:r>
+            <a:endParaRPr lang="en-US" altLang="ko-KR" sz="1400" dirty="0">
+              <a:latin typeface="D2Coding" panose="020B0609020101020101" pitchFamily="49" charset="-127"/>
+              <a:ea typeface="D2Coding" panose="020B0609020101020101" pitchFamily="49" charset="-127"/>
+            </a:endParaRPr>
           </a:p>
         </p:txBody>
       </p:sp>
